--- a/files/CS1501/CS_1501_Slides_1.pptx
+++ b/files/CS1501/CS_1501_Slides_1.pptx
@@ -6,25 +6,26 @@
   </p:sldMasterIdLst>
   <p:sldIdLst>
     <p:sldId id="256" r:id="rId5"/>
-    <p:sldId id="257" r:id="rId6"/>
-    <p:sldId id="258" r:id="rId7"/>
-    <p:sldId id="259" r:id="rId8"/>
-    <p:sldId id="260" r:id="rId9"/>
-    <p:sldId id="270" r:id="rId10"/>
-    <p:sldId id="261" r:id="rId11"/>
-    <p:sldId id="262" r:id="rId12"/>
-    <p:sldId id="263" r:id="rId13"/>
-    <p:sldId id="264" r:id="rId14"/>
-    <p:sldId id="265" r:id="rId15"/>
-    <p:sldId id="266" r:id="rId16"/>
-    <p:sldId id="267" r:id="rId17"/>
-    <p:sldId id="268" r:id="rId18"/>
-    <p:sldId id="269" r:id="rId19"/>
-    <p:sldId id="271" r:id="rId20"/>
-    <p:sldId id="272" r:id="rId21"/>
-    <p:sldId id="273" r:id="rId22"/>
-    <p:sldId id="274" r:id="rId23"/>
-    <p:sldId id="275" r:id="rId24"/>
+    <p:sldId id="297" r:id="rId6"/>
+    <p:sldId id="257" r:id="rId7"/>
+    <p:sldId id="258" r:id="rId8"/>
+    <p:sldId id="259" r:id="rId9"/>
+    <p:sldId id="260" r:id="rId10"/>
+    <p:sldId id="270" r:id="rId11"/>
+    <p:sldId id="261" r:id="rId12"/>
+    <p:sldId id="262" r:id="rId13"/>
+    <p:sldId id="263" r:id="rId14"/>
+    <p:sldId id="264" r:id="rId15"/>
+    <p:sldId id="265" r:id="rId16"/>
+    <p:sldId id="266" r:id="rId17"/>
+    <p:sldId id="267" r:id="rId18"/>
+    <p:sldId id="268" r:id="rId19"/>
+    <p:sldId id="269" r:id="rId20"/>
+    <p:sldId id="271" r:id="rId21"/>
+    <p:sldId id="272" r:id="rId22"/>
+    <p:sldId id="273" r:id="rId23"/>
+    <p:sldId id="274" r:id="rId24"/>
+    <p:sldId id="275" r:id="rId25"/>
   </p:sldIdLst>
   <p:sldSz cx="12192000" cy="6858000"/>
   <p:notesSz cx="6858000" cy="9144000"/>
@@ -5834,6 +5835,243 @@
           <p:cNvPr id="2" name="Title 1">
             <a:extLst>
               <a:ext uri="{FF2B5EF4-FFF2-40B4-BE49-F238E27FC236}">
+                <a16:creationId xmlns:a16="http://schemas.microsoft.com/office/drawing/2014/main" id="{788C3E2A-D1FC-4F12-90D4-A3DA78E6CB13}"/>
+              </a:ext>
+            </a:extLst>
+          </p:cNvPr>
+          <p:cNvSpPr>
+            <a:spLocks noGrp="1"/>
+          </p:cNvSpPr>
+          <p:nvPr>
+            <p:ph type="title"/>
+          </p:nvPr>
+        </p:nvSpPr>
+        <p:spPr/>
+        <p:txBody>
+          <a:bodyPr/>
+          <a:lstStyle/>
+          <a:p>
+            <a:r>
+              <a:rPr lang="en-US" dirty="0"/>
+              <a:t>What are the similarities?</a:t>
+            </a:r>
+          </a:p>
+        </p:txBody>
+      </p:sp>
+      <p:sp>
+        <p:nvSpPr>
+          <p:cNvPr id="3" name="Content Placeholder 2">
+            <a:extLst>
+              <a:ext uri="{FF2B5EF4-FFF2-40B4-BE49-F238E27FC236}">
+                <a16:creationId xmlns:a16="http://schemas.microsoft.com/office/drawing/2014/main" id="{37DDEC3A-88A8-4B6E-89E5-C90DDFAC9D1E}"/>
+              </a:ext>
+            </a:extLst>
+          </p:cNvPr>
+          <p:cNvSpPr>
+            <a:spLocks noGrp="1"/>
+          </p:cNvSpPr>
+          <p:nvPr>
+            <p:ph idx="1"/>
+          </p:nvPr>
+        </p:nvSpPr>
+        <p:spPr/>
+        <p:txBody>
+          <a:bodyPr/>
+          <a:lstStyle/>
+          <a:p>
+            <a:r>
+              <a:rPr lang="en-US" dirty="0"/>
+              <a:t>Well, they all require direct comparisons along elements in the collection, so you’ll always have that linear term.</a:t>
+            </a:r>
+          </a:p>
+          <a:p>
+            <a:endParaRPr lang="en-US" dirty="0"/>
+          </a:p>
+          <a:p>
+            <a:r>
+              <a:rPr lang="en-US" dirty="0"/>
+              <a:t>Thus, we’ll regard this class of sorting algorithms as: </a:t>
+            </a:r>
+            <a:r>
+              <a:rPr lang="en-US" b="1" dirty="0"/>
+              <a:t>Comparison based</a:t>
+            </a:r>
+            <a:r>
+              <a:rPr lang="en-US" dirty="0"/>
+              <a:t>.</a:t>
+            </a:r>
+          </a:p>
+          <a:p>
+            <a:endParaRPr lang="en-US" dirty="0"/>
+          </a:p>
+        </p:txBody>
+      </p:sp>
+    </p:spTree>
+    <p:extLst>
+      <p:ext uri="{BB962C8B-B14F-4D97-AF65-F5344CB8AC3E}">
+        <p14:creationId xmlns:p14="http://schemas.microsoft.com/office/powerpoint/2010/main" val="2234172799"/>
+      </p:ext>
+    </p:extLst>
+  </p:cSld>
+  <p:clrMapOvr>
+    <a:masterClrMapping/>
+  </p:clrMapOvr>
+  <p:timing>
+    <p:tnLst>
+      <p:par>
+        <p:cTn id="1" dur="indefinite" restart="never" nodeType="tmRoot">
+          <p:childTnLst>
+            <p:seq concurrent="1" nextAc="seek">
+              <p:cTn id="2" dur="indefinite" nodeType="mainSeq">
+                <p:childTnLst>
+                  <p:par>
+                    <p:cTn id="3" fill="hold">
+                      <p:stCondLst>
+                        <p:cond delay="indefinite"/>
+                      </p:stCondLst>
+                      <p:childTnLst>
+                        <p:par>
+                          <p:cTn id="4" fill="hold">
+                            <p:stCondLst>
+                              <p:cond delay="0"/>
+                            </p:stCondLst>
+                            <p:childTnLst>
+                              <p:par>
+                                <p:cTn id="5" presetID="1" presetClass="entr" presetSubtype="0" fill="hold" grpId="0" nodeType="clickEffect">
+                                  <p:stCondLst>
+                                    <p:cond delay="0"/>
+                                  </p:stCondLst>
+                                  <p:childTnLst>
+                                    <p:set>
+                                      <p:cBhvr>
+                                        <p:cTn id="6" dur="1" fill="hold">
+                                          <p:stCondLst>
+                                            <p:cond delay="0"/>
+                                          </p:stCondLst>
+                                        </p:cTn>
+                                        <p:tgtEl>
+                                          <p:spTgt spid="3">
+                                            <p:txEl>
+                                              <p:pRg st="0" end="0"/>
+                                            </p:txEl>
+                                          </p:spTgt>
+                                        </p:tgtEl>
+                                        <p:attrNameLst>
+                                          <p:attrName>style.visibility</p:attrName>
+                                        </p:attrNameLst>
+                                      </p:cBhvr>
+                                      <p:to>
+                                        <p:strVal val="visible"/>
+                                      </p:to>
+                                    </p:set>
+                                  </p:childTnLst>
+                                </p:cTn>
+                              </p:par>
+                            </p:childTnLst>
+                          </p:cTn>
+                        </p:par>
+                      </p:childTnLst>
+                    </p:cTn>
+                  </p:par>
+                  <p:par>
+                    <p:cTn id="7" fill="hold">
+                      <p:stCondLst>
+                        <p:cond delay="indefinite"/>
+                      </p:stCondLst>
+                      <p:childTnLst>
+                        <p:par>
+                          <p:cTn id="8" fill="hold">
+                            <p:stCondLst>
+                              <p:cond delay="0"/>
+                            </p:stCondLst>
+                            <p:childTnLst>
+                              <p:par>
+                                <p:cTn id="9" presetID="1" presetClass="entr" presetSubtype="0" fill="hold" grpId="0" nodeType="clickEffect">
+                                  <p:stCondLst>
+                                    <p:cond delay="0"/>
+                                  </p:stCondLst>
+                                  <p:childTnLst>
+                                    <p:set>
+                                      <p:cBhvr>
+                                        <p:cTn id="10" dur="1" fill="hold">
+                                          <p:stCondLst>
+                                            <p:cond delay="0"/>
+                                          </p:stCondLst>
+                                        </p:cTn>
+                                        <p:tgtEl>
+                                          <p:spTgt spid="3">
+                                            <p:txEl>
+                                              <p:pRg st="2" end="2"/>
+                                            </p:txEl>
+                                          </p:spTgt>
+                                        </p:tgtEl>
+                                        <p:attrNameLst>
+                                          <p:attrName>style.visibility</p:attrName>
+                                        </p:attrNameLst>
+                                      </p:cBhvr>
+                                      <p:to>
+                                        <p:strVal val="visible"/>
+                                      </p:to>
+                                    </p:set>
+                                  </p:childTnLst>
+                                </p:cTn>
+                              </p:par>
+                            </p:childTnLst>
+                          </p:cTn>
+                        </p:par>
+                      </p:childTnLst>
+                    </p:cTn>
+                  </p:par>
+                </p:childTnLst>
+              </p:cTn>
+              <p:prevCondLst>
+                <p:cond evt="onPrev" delay="0">
+                  <p:tgtEl>
+                    <p:sldTgt/>
+                  </p:tgtEl>
+                </p:cond>
+              </p:prevCondLst>
+              <p:nextCondLst>
+                <p:cond evt="onNext" delay="0">
+                  <p:tgtEl>
+                    <p:sldTgt/>
+                  </p:tgtEl>
+                </p:cond>
+              </p:nextCondLst>
+            </p:seq>
+          </p:childTnLst>
+        </p:cTn>
+      </p:par>
+    </p:tnLst>
+    <p:bldLst>
+      <p:bldP spid="3" grpId="0" build="p"/>
+    </p:bldLst>
+  </p:timing>
+</p:sld>
+</file>
+
+<file path=ppt/slides/slide11.xml><?xml version="1.0" encoding="utf-8"?>
+<p:sld xmlns:a="http://schemas.openxmlformats.org/drawingml/2006/main" xmlns:r="http://schemas.openxmlformats.org/officeDocument/2006/relationships" xmlns:p="http://schemas.openxmlformats.org/presentationml/2006/main">
+  <p:cSld>
+    <p:spTree>
+      <p:nvGrpSpPr>
+        <p:cNvPr id="1" name=""/>
+        <p:cNvGrpSpPr/>
+        <p:nvPr/>
+      </p:nvGrpSpPr>
+      <p:grpSpPr>
+        <a:xfrm>
+          <a:off x="0" y="0"/>
+          <a:ext cx="0" cy="0"/>
+          <a:chOff x="0" y="0"/>
+          <a:chExt cx="0" cy="0"/>
+        </a:xfrm>
+      </p:grpSpPr>
+      <p:sp>
+        <p:nvSpPr>
+          <p:cNvPr id="2" name="Title 1">
+            <a:extLst>
+              <a:ext uri="{FF2B5EF4-FFF2-40B4-BE49-F238E27FC236}">
                 <a16:creationId xmlns:a16="http://schemas.microsoft.com/office/drawing/2014/main" id="{89C0CFC5-358B-4865-B15D-B61618727201}"/>
               </a:ext>
             </a:extLst>
@@ -5983,7 +6221,7 @@
 </p:sld>
 </file>
 
-<file path=ppt/slides/slide11.xml><?xml version="1.0" encoding="utf-8"?>
+<file path=ppt/slides/slide12.xml><?xml version="1.0" encoding="utf-8"?>
 <p:sld xmlns:a="http://schemas.openxmlformats.org/drawingml/2006/main" xmlns:r="http://schemas.openxmlformats.org/officeDocument/2006/relationships" xmlns:p="http://schemas.openxmlformats.org/presentationml/2006/main">
   <p:cSld>
     <p:spTree>
@@ -6466,7 +6704,7 @@
 </p:sld>
 </file>
 
-<file path=ppt/slides/slide12.xml><?xml version="1.0" encoding="utf-8"?>
+<file path=ppt/slides/slide13.xml><?xml version="1.0" encoding="utf-8"?>
 <p:sld xmlns:a="http://schemas.openxmlformats.org/drawingml/2006/main" xmlns:r="http://schemas.openxmlformats.org/officeDocument/2006/relationships" xmlns:p="http://schemas.openxmlformats.org/presentationml/2006/main">
   <p:cSld>
     <p:spTree>
@@ -6701,7 +6939,7 @@
 </p:sld>
 </file>
 
-<file path=ppt/slides/slide13.xml><?xml version="1.0" encoding="utf-8"?>
+<file path=ppt/slides/slide14.xml><?xml version="1.0" encoding="utf-8"?>
 <p:sld xmlns:a="http://schemas.openxmlformats.org/drawingml/2006/main" xmlns:r="http://schemas.openxmlformats.org/officeDocument/2006/relationships" xmlns:p="http://schemas.openxmlformats.org/presentationml/2006/main">
   <p:cSld>
     <p:spTree>
@@ -10151,7 +10389,7 @@
 </p:sld>
 </file>
 
-<file path=ppt/slides/slide14.xml><?xml version="1.0" encoding="utf-8"?>
+<file path=ppt/slides/slide15.xml><?xml version="1.0" encoding="utf-8"?>
 <p:sld xmlns:a="http://schemas.openxmlformats.org/drawingml/2006/main" xmlns:r="http://schemas.openxmlformats.org/officeDocument/2006/relationships" xmlns:p="http://schemas.openxmlformats.org/presentationml/2006/main">
   <p:cSld>
     <p:spTree>
@@ -13449,7 +13687,7 @@
 </p:sld>
 </file>
 
-<file path=ppt/slides/slide15.xml><?xml version="1.0" encoding="utf-8"?>
+<file path=ppt/slides/slide16.xml><?xml version="1.0" encoding="utf-8"?>
 <p:sld xmlns:a="http://schemas.openxmlformats.org/drawingml/2006/main" xmlns:r="http://schemas.openxmlformats.org/officeDocument/2006/relationships" xmlns:p="http://schemas.openxmlformats.org/presentationml/2006/main">
   <p:cSld>
     <p:spTree>
@@ -16816,7 +17054,7 @@
 </p:sld>
 </file>
 
-<file path=ppt/slides/slide16.xml><?xml version="1.0" encoding="utf-8"?>
+<file path=ppt/slides/slide17.xml><?xml version="1.0" encoding="utf-8"?>
 <p:sld xmlns:a="http://schemas.openxmlformats.org/drawingml/2006/main" xmlns:r="http://schemas.openxmlformats.org/officeDocument/2006/relationships" xmlns:p="http://schemas.openxmlformats.org/presentationml/2006/main">
   <p:cSld>
     <p:spTree>
@@ -17115,7 +17353,7 @@
 </p:sld>
 </file>
 
-<file path=ppt/slides/slide17.xml><?xml version="1.0" encoding="utf-8"?>
+<file path=ppt/slides/slide18.xml><?xml version="1.0" encoding="utf-8"?>
 <p:sld xmlns:a="http://schemas.openxmlformats.org/drawingml/2006/main" xmlns:r="http://schemas.openxmlformats.org/officeDocument/2006/relationships" xmlns:p="http://schemas.openxmlformats.org/presentationml/2006/main">
   <p:cSld>
     <p:spTree>
@@ -17487,7 +17725,7 @@
 </p:sld>
 </file>
 
-<file path=ppt/slides/slide18.xml><?xml version="1.0" encoding="utf-8"?>
+<file path=ppt/slides/slide19.xml><?xml version="1.0" encoding="utf-8"?>
 <p:sld xmlns:a="http://schemas.openxmlformats.org/drawingml/2006/main" xmlns:r="http://schemas.openxmlformats.org/officeDocument/2006/relationships" xmlns:p="http://schemas.openxmlformats.org/presentationml/2006/main">
   <p:cSld>
     <p:spTree>
@@ -17682,7 +17920,99 @@
 </p:sld>
 </file>
 
-<file path=ppt/slides/slide19.xml><?xml version="1.0" encoding="utf-8"?>
+<file path=ppt/slides/slide2.xml><?xml version="1.0" encoding="utf-8"?>
+<p:sld xmlns:a="http://schemas.openxmlformats.org/drawingml/2006/main" xmlns:r="http://schemas.openxmlformats.org/officeDocument/2006/relationships" xmlns:p="http://schemas.openxmlformats.org/presentationml/2006/main">
+  <p:cSld>
+    <p:spTree>
+      <p:nvGrpSpPr>
+        <p:cNvPr id="1" name=""/>
+        <p:cNvGrpSpPr/>
+        <p:nvPr/>
+      </p:nvGrpSpPr>
+      <p:grpSpPr>
+        <a:xfrm>
+          <a:off x="0" y="0"/>
+          <a:ext cx="0" cy="0"/>
+          <a:chOff x="0" y="0"/>
+          <a:chExt cx="0" cy="0"/>
+        </a:xfrm>
+      </p:grpSpPr>
+      <p:sp>
+        <p:nvSpPr>
+          <p:cNvPr id="2" name="Title 1">
+            <a:extLst>
+              <a:ext uri="{FF2B5EF4-FFF2-40B4-BE49-F238E27FC236}">
+                <a16:creationId xmlns:a16="http://schemas.microsoft.com/office/drawing/2014/main" id="{E5392559-7F14-4F93-96B0-9F4F082707C8}"/>
+              </a:ext>
+            </a:extLst>
+          </p:cNvPr>
+          <p:cNvSpPr>
+            <a:spLocks noGrp="1"/>
+          </p:cNvSpPr>
+          <p:nvPr>
+            <p:ph type="title"/>
+          </p:nvPr>
+        </p:nvSpPr>
+        <p:spPr/>
+        <p:txBody>
+          <a:bodyPr/>
+          <a:lstStyle/>
+          <a:p>
+            <a:r>
+              <a:rPr lang="en-US" dirty="0"/>
+              <a:t>A brief note on these slides</a:t>
+            </a:r>
+          </a:p>
+        </p:txBody>
+      </p:sp>
+      <p:sp>
+        <p:nvSpPr>
+          <p:cNvPr id="3" name="Content Placeholder 2">
+            <a:extLst>
+              <a:ext uri="{FF2B5EF4-FFF2-40B4-BE49-F238E27FC236}">
+                <a16:creationId xmlns:a16="http://schemas.microsoft.com/office/drawing/2014/main" id="{4AC27C56-47D1-4ECC-83E5-5345C34C452D}"/>
+              </a:ext>
+            </a:extLst>
+          </p:cNvPr>
+          <p:cNvSpPr>
+            <a:spLocks noGrp="1"/>
+          </p:cNvSpPr>
+          <p:nvPr>
+            <p:ph idx="1"/>
+          </p:nvPr>
+        </p:nvSpPr>
+        <p:spPr/>
+        <p:txBody>
+          <a:bodyPr/>
+          <a:lstStyle/>
+          <a:p>
+            <a:r>
+              <a:rPr lang="en-US" dirty="0"/>
+              <a:t>Visually, slides don’t look the most appealing….</a:t>
+            </a:r>
+          </a:p>
+          <a:p>
+            <a:r>
+              <a:rPr lang="en-US" dirty="0"/>
+              <a:t>Work best in present mode! Each algorithm is animated, so all the messy stuff is from all the animations…</a:t>
+            </a:r>
+          </a:p>
+        </p:txBody>
+      </p:sp>
+    </p:spTree>
+    <p:extLst>
+      <p:ext uri="{BB962C8B-B14F-4D97-AF65-F5344CB8AC3E}">
+        <p14:creationId xmlns:p14="http://schemas.microsoft.com/office/powerpoint/2010/main" val="3196868384"/>
+      </p:ext>
+    </p:extLst>
+  </p:cSld>
+  <p:clrMapOvr>
+    <a:masterClrMapping/>
+  </p:clrMapOvr>
+</p:sld>
+</file>
+
+<file path=ppt/slides/slide20.xml><?xml version="1.0" encoding="utf-8"?>
 <p:sld xmlns:a="http://schemas.openxmlformats.org/drawingml/2006/main" xmlns:r="http://schemas.openxmlformats.org/officeDocument/2006/relationships" xmlns:p="http://schemas.openxmlformats.org/presentationml/2006/main">
   <p:cSld>
     <p:spTree>
@@ -17921,7 +18251,246 @@
 </p:sld>
 </file>
 
-<file path=ppt/slides/slide2.xml><?xml version="1.0" encoding="utf-8"?>
+<file path=ppt/slides/slide21.xml><?xml version="1.0" encoding="utf-8"?>
+<p:sld xmlns:a="http://schemas.openxmlformats.org/drawingml/2006/main" xmlns:r="http://schemas.openxmlformats.org/officeDocument/2006/relationships" xmlns:p="http://schemas.openxmlformats.org/presentationml/2006/main">
+  <p:cSld>
+    <p:spTree>
+      <p:nvGrpSpPr>
+        <p:cNvPr id="1" name=""/>
+        <p:cNvGrpSpPr/>
+        <p:nvPr/>
+      </p:nvGrpSpPr>
+      <p:grpSpPr>
+        <a:xfrm>
+          <a:off x="0" y="0"/>
+          <a:ext cx="0" cy="0"/>
+          <a:chOff x="0" y="0"/>
+          <a:chExt cx="0" cy="0"/>
+        </a:xfrm>
+      </p:grpSpPr>
+      <p:sp>
+        <p:nvSpPr>
+          <p:cNvPr id="2" name="Title 1">
+            <a:extLst>
+              <a:ext uri="{FF2B5EF4-FFF2-40B4-BE49-F238E27FC236}">
+                <a16:creationId xmlns:a16="http://schemas.microsoft.com/office/drawing/2014/main" id="{7F5026BE-2406-45E3-AD16-972310BE7BBA}"/>
+              </a:ext>
+            </a:extLst>
+          </p:cNvPr>
+          <p:cNvSpPr>
+            <a:spLocks noGrp="1"/>
+          </p:cNvSpPr>
+          <p:nvPr>
+            <p:ph type="title"/>
+          </p:nvPr>
+        </p:nvSpPr>
+        <p:spPr/>
+        <p:txBody>
+          <a:bodyPr/>
+          <a:lstStyle/>
+          <a:p>
+            <a:r>
+              <a:rPr lang="en-US" dirty="0"/>
+              <a:t>Radix Sort: In-Place/Stability</a:t>
+            </a:r>
+          </a:p>
+        </p:txBody>
+      </p:sp>
+      <p:sp>
+        <p:nvSpPr>
+          <p:cNvPr id="3" name="Content Placeholder 2">
+            <a:extLst>
+              <a:ext uri="{FF2B5EF4-FFF2-40B4-BE49-F238E27FC236}">
+                <a16:creationId xmlns:a16="http://schemas.microsoft.com/office/drawing/2014/main" id="{36069821-BC84-4954-BACA-0F03F48772EF}"/>
+              </a:ext>
+            </a:extLst>
+          </p:cNvPr>
+          <p:cNvSpPr>
+            <a:spLocks noGrp="1"/>
+          </p:cNvSpPr>
+          <p:nvPr>
+            <p:ph idx="1"/>
+          </p:nvPr>
+        </p:nvSpPr>
+        <p:spPr/>
+        <p:txBody>
+          <a:bodyPr/>
+          <a:lstStyle/>
+          <a:p>
+            <a:r>
+              <a:rPr lang="en-US" dirty="0"/>
+              <a:t>Radix Sort is not </a:t>
+            </a:r>
+            <a:r>
+              <a:rPr lang="en-US" b="1" dirty="0"/>
+              <a:t>In-Place</a:t>
+            </a:r>
+            <a:r>
+              <a:rPr lang="en-US" dirty="0"/>
+              <a:t>: We have to move items into an auxiliary Array, then copy back.</a:t>
+            </a:r>
+          </a:p>
+          <a:p>
+            <a:r>
+              <a:rPr lang="en-US" dirty="0"/>
+              <a:t>Radix Sort is </a:t>
+            </a:r>
+            <a:r>
+              <a:rPr lang="en-US" b="1" dirty="0"/>
+              <a:t>Stable</a:t>
+            </a:r>
+            <a:r>
+              <a:rPr lang="en-US" dirty="0"/>
+              <a:t>, as it maintains the relative ordering among digits to not lose much work.</a:t>
+            </a:r>
+          </a:p>
+        </p:txBody>
+      </p:sp>
+    </p:spTree>
+    <p:extLst>
+      <p:ext uri="{BB962C8B-B14F-4D97-AF65-F5344CB8AC3E}">
+        <p14:creationId xmlns:p14="http://schemas.microsoft.com/office/powerpoint/2010/main" val="3102877048"/>
+      </p:ext>
+    </p:extLst>
+  </p:cSld>
+  <p:clrMapOvr>
+    <a:masterClrMapping/>
+  </p:clrMapOvr>
+  <p:timing>
+    <p:tnLst>
+      <p:par>
+        <p:cTn id="1" dur="indefinite" restart="never" nodeType="tmRoot">
+          <p:childTnLst>
+            <p:seq concurrent="1" nextAc="seek">
+              <p:cTn id="2" dur="indefinite" nodeType="mainSeq">
+                <p:childTnLst>
+                  <p:par>
+                    <p:cTn id="3" fill="hold">
+                      <p:stCondLst>
+                        <p:cond delay="indefinite"/>
+                      </p:stCondLst>
+                      <p:childTnLst>
+                        <p:par>
+                          <p:cTn id="4" fill="hold">
+                            <p:stCondLst>
+                              <p:cond delay="0"/>
+                            </p:stCondLst>
+                            <p:childTnLst>
+                              <p:par>
+                                <p:cTn id="5" presetID="1" presetClass="entr" presetSubtype="0" fill="hold" grpId="0" nodeType="clickEffect">
+                                  <p:stCondLst>
+                                    <p:cond delay="0"/>
+                                  </p:stCondLst>
+                                  <p:childTnLst>
+                                    <p:set>
+                                      <p:cBhvr>
+                                        <p:cTn id="6" dur="1" fill="hold">
+                                          <p:stCondLst>
+                                            <p:cond delay="0"/>
+                                          </p:stCondLst>
+                                        </p:cTn>
+                                        <p:tgtEl>
+                                          <p:spTgt spid="3">
+                                            <p:txEl>
+                                              <p:pRg st="0" end="0"/>
+                                            </p:txEl>
+                                          </p:spTgt>
+                                        </p:tgtEl>
+                                        <p:attrNameLst>
+                                          <p:attrName>style.visibility</p:attrName>
+                                        </p:attrNameLst>
+                                      </p:cBhvr>
+                                      <p:to>
+                                        <p:strVal val="visible"/>
+                                      </p:to>
+                                    </p:set>
+                                  </p:childTnLst>
+                                </p:cTn>
+                              </p:par>
+                            </p:childTnLst>
+                          </p:cTn>
+                        </p:par>
+                      </p:childTnLst>
+                    </p:cTn>
+                  </p:par>
+                  <p:par>
+                    <p:cTn id="7" fill="hold">
+                      <p:stCondLst>
+                        <p:cond delay="indefinite"/>
+                      </p:stCondLst>
+                      <p:childTnLst>
+                        <p:par>
+                          <p:cTn id="8" fill="hold">
+                            <p:stCondLst>
+                              <p:cond delay="0"/>
+                            </p:stCondLst>
+                            <p:childTnLst>
+                              <p:par>
+                                <p:cTn id="9" presetID="1" presetClass="entr" presetSubtype="0" fill="hold" grpId="0" nodeType="clickEffect">
+                                  <p:stCondLst>
+                                    <p:cond delay="0"/>
+                                  </p:stCondLst>
+                                  <p:childTnLst>
+                                    <p:set>
+                                      <p:cBhvr>
+                                        <p:cTn id="10" dur="1" fill="hold">
+                                          <p:stCondLst>
+                                            <p:cond delay="0"/>
+                                          </p:stCondLst>
+                                        </p:cTn>
+                                        <p:tgtEl>
+                                          <p:spTgt spid="3">
+                                            <p:txEl>
+                                              <p:pRg st="1" end="1"/>
+                                            </p:txEl>
+                                          </p:spTgt>
+                                        </p:tgtEl>
+                                        <p:attrNameLst>
+                                          <p:attrName>style.visibility</p:attrName>
+                                        </p:attrNameLst>
+                                      </p:cBhvr>
+                                      <p:to>
+                                        <p:strVal val="visible"/>
+                                      </p:to>
+                                    </p:set>
+                                  </p:childTnLst>
+                                </p:cTn>
+                              </p:par>
+                            </p:childTnLst>
+                          </p:cTn>
+                        </p:par>
+                      </p:childTnLst>
+                    </p:cTn>
+                  </p:par>
+                </p:childTnLst>
+              </p:cTn>
+              <p:prevCondLst>
+                <p:cond evt="onPrev" delay="0">
+                  <p:tgtEl>
+                    <p:sldTgt/>
+                  </p:tgtEl>
+                </p:cond>
+              </p:prevCondLst>
+              <p:nextCondLst>
+                <p:cond evt="onNext" delay="0">
+                  <p:tgtEl>
+                    <p:sldTgt/>
+                  </p:tgtEl>
+                </p:cond>
+              </p:nextCondLst>
+            </p:seq>
+          </p:childTnLst>
+        </p:cTn>
+      </p:par>
+    </p:tnLst>
+    <p:bldLst>
+      <p:bldP spid="3" grpId="0" build="p"/>
+    </p:bldLst>
+  </p:timing>
+</p:sld>
+</file>
+
+<file path=ppt/slides/slide3.xml><?xml version="1.0" encoding="utf-8"?>
 <p:sld xmlns:a="http://schemas.openxmlformats.org/drawingml/2006/main" xmlns:r="http://schemas.openxmlformats.org/officeDocument/2006/relationships" xmlns:p="http://schemas.openxmlformats.org/presentationml/2006/main">
   <p:cSld>
     <p:spTree>
@@ -18212,246 +18781,7 @@
 </p:sld>
 </file>
 
-<file path=ppt/slides/slide20.xml><?xml version="1.0" encoding="utf-8"?>
-<p:sld xmlns:a="http://schemas.openxmlformats.org/drawingml/2006/main" xmlns:r="http://schemas.openxmlformats.org/officeDocument/2006/relationships" xmlns:p="http://schemas.openxmlformats.org/presentationml/2006/main">
-  <p:cSld>
-    <p:spTree>
-      <p:nvGrpSpPr>
-        <p:cNvPr id="1" name=""/>
-        <p:cNvGrpSpPr/>
-        <p:nvPr/>
-      </p:nvGrpSpPr>
-      <p:grpSpPr>
-        <a:xfrm>
-          <a:off x="0" y="0"/>
-          <a:ext cx="0" cy="0"/>
-          <a:chOff x="0" y="0"/>
-          <a:chExt cx="0" cy="0"/>
-        </a:xfrm>
-      </p:grpSpPr>
-      <p:sp>
-        <p:nvSpPr>
-          <p:cNvPr id="2" name="Title 1">
-            <a:extLst>
-              <a:ext uri="{FF2B5EF4-FFF2-40B4-BE49-F238E27FC236}">
-                <a16:creationId xmlns:a16="http://schemas.microsoft.com/office/drawing/2014/main" id="{7F5026BE-2406-45E3-AD16-972310BE7BBA}"/>
-              </a:ext>
-            </a:extLst>
-          </p:cNvPr>
-          <p:cNvSpPr>
-            <a:spLocks noGrp="1"/>
-          </p:cNvSpPr>
-          <p:nvPr>
-            <p:ph type="title"/>
-          </p:nvPr>
-        </p:nvSpPr>
-        <p:spPr/>
-        <p:txBody>
-          <a:bodyPr/>
-          <a:lstStyle/>
-          <a:p>
-            <a:r>
-              <a:rPr lang="en-US" dirty="0"/>
-              <a:t>Radix Sort: In-Place/Stability</a:t>
-            </a:r>
-          </a:p>
-        </p:txBody>
-      </p:sp>
-      <p:sp>
-        <p:nvSpPr>
-          <p:cNvPr id="3" name="Content Placeholder 2">
-            <a:extLst>
-              <a:ext uri="{FF2B5EF4-FFF2-40B4-BE49-F238E27FC236}">
-                <a16:creationId xmlns:a16="http://schemas.microsoft.com/office/drawing/2014/main" id="{36069821-BC84-4954-BACA-0F03F48772EF}"/>
-              </a:ext>
-            </a:extLst>
-          </p:cNvPr>
-          <p:cNvSpPr>
-            <a:spLocks noGrp="1"/>
-          </p:cNvSpPr>
-          <p:nvPr>
-            <p:ph idx="1"/>
-          </p:nvPr>
-        </p:nvSpPr>
-        <p:spPr/>
-        <p:txBody>
-          <a:bodyPr/>
-          <a:lstStyle/>
-          <a:p>
-            <a:r>
-              <a:rPr lang="en-US" dirty="0"/>
-              <a:t>Radix Sort is not </a:t>
-            </a:r>
-            <a:r>
-              <a:rPr lang="en-US" b="1" dirty="0"/>
-              <a:t>In-Place</a:t>
-            </a:r>
-            <a:r>
-              <a:rPr lang="en-US" dirty="0"/>
-              <a:t>: We have to move items into an auxiliary Array, then copy back.</a:t>
-            </a:r>
-          </a:p>
-          <a:p>
-            <a:r>
-              <a:rPr lang="en-US" dirty="0"/>
-              <a:t>Radix Sort is </a:t>
-            </a:r>
-            <a:r>
-              <a:rPr lang="en-US" b="1" dirty="0"/>
-              <a:t>Stable</a:t>
-            </a:r>
-            <a:r>
-              <a:rPr lang="en-US" dirty="0"/>
-              <a:t>, as it maintains the relative ordering among digits to not lose much work.</a:t>
-            </a:r>
-          </a:p>
-        </p:txBody>
-      </p:sp>
-    </p:spTree>
-    <p:extLst>
-      <p:ext uri="{BB962C8B-B14F-4D97-AF65-F5344CB8AC3E}">
-        <p14:creationId xmlns:p14="http://schemas.microsoft.com/office/powerpoint/2010/main" val="3102877048"/>
-      </p:ext>
-    </p:extLst>
-  </p:cSld>
-  <p:clrMapOvr>
-    <a:masterClrMapping/>
-  </p:clrMapOvr>
-  <p:timing>
-    <p:tnLst>
-      <p:par>
-        <p:cTn id="1" dur="indefinite" restart="never" nodeType="tmRoot">
-          <p:childTnLst>
-            <p:seq concurrent="1" nextAc="seek">
-              <p:cTn id="2" dur="indefinite" nodeType="mainSeq">
-                <p:childTnLst>
-                  <p:par>
-                    <p:cTn id="3" fill="hold">
-                      <p:stCondLst>
-                        <p:cond delay="indefinite"/>
-                      </p:stCondLst>
-                      <p:childTnLst>
-                        <p:par>
-                          <p:cTn id="4" fill="hold">
-                            <p:stCondLst>
-                              <p:cond delay="0"/>
-                            </p:stCondLst>
-                            <p:childTnLst>
-                              <p:par>
-                                <p:cTn id="5" presetID="1" presetClass="entr" presetSubtype="0" fill="hold" grpId="0" nodeType="clickEffect">
-                                  <p:stCondLst>
-                                    <p:cond delay="0"/>
-                                  </p:stCondLst>
-                                  <p:childTnLst>
-                                    <p:set>
-                                      <p:cBhvr>
-                                        <p:cTn id="6" dur="1" fill="hold">
-                                          <p:stCondLst>
-                                            <p:cond delay="0"/>
-                                          </p:stCondLst>
-                                        </p:cTn>
-                                        <p:tgtEl>
-                                          <p:spTgt spid="3">
-                                            <p:txEl>
-                                              <p:pRg st="0" end="0"/>
-                                            </p:txEl>
-                                          </p:spTgt>
-                                        </p:tgtEl>
-                                        <p:attrNameLst>
-                                          <p:attrName>style.visibility</p:attrName>
-                                        </p:attrNameLst>
-                                      </p:cBhvr>
-                                      <p:to>
-                                        <p:strVal val="visible"/>
-                                      </p:to>
-                                    </p:set>
-                                  </p:childTnLst>
-                                </p:cTn>
-                              </p:par>
-                            </p:childTnLst>
-                          </p:cTn>
-                        </p:par>
-                      </p:childTnLst>
-                    </p:cTn>
-                  </p:par>
-                  <p:par>
-                    <p:cTn id="7" fill="hold">
-                      <p:stCondLst>
-                        <p:cond delay="indefinite"/>
-                      </p:stCondLst>
-                      <p:childTnLst>
-                        <p:par>
-                          <p:cTn id="8" fill="hold">
-                            <p:stCondLst>
-                              <p:cond delay="0"/>
-                            </p:stCondLst>
-                            <p:childTnLst>
-                              <p:par>
-                                <p:cTn id="9" presetID="1" presetClass="entr" presetSubtype="0" fill="hold" grpId="0" nodeType="clickEffect">
-                                  <p:stCondLst>
-                                    <p:cond delay="0"/>
-                                  </p:stCondLst>
-                                  <p:childTnLst>
-                                    <p:set>
-                                      <p:cBhvr>
-                                        <p:cTn id="10" dur="1" fill="hold">
-                                          <p:stCondLst>
-                                            <p:cond delay="0"/>
-                                          </p:stCondLst>
-                                        </p:cTn>
-                                        <p:tgtEl>
-                                          <p:spTgt spid="3">
-                                            <p:txEl>
-                                              <p:pRg st="1" end="1"/>
-                                            </p:txEl>
-                                          </p:spTgt>
-                                        </p:tgtEl>
-                                        <p:attrNameLst>
-                                          <p:attrName>style.visibility</p:attrName>
-                                        </p:attrNameLst>
-                                      </p:cBhvr>
-                                      <p:to>
-                                        <p:strVal val="visible"/>
-                                      </p:to>
-                                    </p:set>
-                                  </p:childTnLst>
-                                </p:cTn>
-                              </p:par>
-                            </p:childTnLst>
-                          </p:cTn>
-                        </p:par>
-                      </p:childTnLst>
-                    </p:cTn>
-                  </p:par>
-                </p:childTnLst>
-              </p:cTn>
-              <p:prevCondLst>
-                <p:cond evt="onPrev" delay="0">
-                  <p:tgtEl>
-                    <p:sldTgt/>
-                  </p:tgtEl>
-                </p:cond>
-              </p:prevCondLst>
-              <p:nextCondLst>
-                <p:cond evt="onNext" delay="0">
-                  <p:tgtEl>
-                    <p:sldTgt/>
-                  </p:tgtEl>
-                </p:cond>
-              </p:nextCondLst>
-            </p:seq>
-          </p:childTnLst>
-        </p:cTn>
-      </p:par>
-    </p:tnLst>
-    <p:bldLst>
-      <p:bldP spid="3" grpId="0" build="p"/>
-    </p:bldLst>
-  </p:timing>
-</p:sld>
-</file>
-
-<file path=ppt/slides/slide3.xml><?xml version="1.0" encoding="utf-8"?>
+<file path=ppt/slides/slide4.xml><?xml version="1.0" encoding="utf-8"?>
 <p:sld xmlns:a="http://schemas.openxmlformats.org/drawingml/2006/main" xmlns:r="http://schemas.openxmlformats.org/officeDocument/2006/relationships" xmlns:p="http://schemas.openxmlformats.org/presentationml/2006/main">
   <p:cSld>
     <p:spTree>
@@ -19190,7 +19520,7 @@
 </p:sld>
 </file>
 
-<file path=ppt/slides/slide4.xml><?xml version="1.0" encoding="utf-8"?>
+<file path=ppt/slides/slide5.xml><?xml version="1.0" encoding="utf-8"?>
 <p:sld xmlns:a="http://schemas.openxmlformats.org/drawingml/2006/main" xmlns:r="http://schemas.openxmlformats.org/officeDocument/2006/relationships" xmlns:p="http://schemas.openxmlformats.org/presentationml/2006/main">
   <p:cSld>
     <p:spTree>
@@ -19484,7 +19814,7 @@
 </p:sld>
 </file>
 
-<file path=ppt/slides/slide5.xml><?xml version="1.0" encoding="utf-8"?>
+<file path=ppt/slides/slide6.xml><?xml version="1.0" encoding="utf-8"?>
 <p:sld xmlns:a="http://schemas.openxmlformats.org/drawingml/2006/main" xmlns:r="http://schemas.openxmlformats.org/officeDocument/2006/relationships" xmlns:p="http://schemas.openxmlformats.org/presentationml/2006/main">
   <p:cSld>
     <p:spTree>
@@ -19896,7 +20226,7 @@
 </p:sld>
 </file>
 
-<file path=ppt/slides/slide6.xml><?xml version="1.0" encoding="utf-8"?>
+<file path=ppt/slides/slide7.xml><?xml version="1.0" encoding="utf-8"?>
 <p:sld xmlns:a="http://schemas.openxmlformats.org/drawingml/2006/main" xmlns:r="http://schemas.openxmlformats.org/officeDocument/2006/relationships" xmlns:p="http://schemas.openxmlformats.org/presentationml/2006/main">
   <p:cSld>
     <p:spTree>
@@ -19941,8 +20271,8 @@
           </a:p>
         </p:txBody>
       </p:sp>
-      <mc:AlternateContent xmlns:mc="http://schemas.openxmlformats.org/markup-compatibility/2006">
-        <mc:Choice xmlns:a14="http://schemas.microsoft.com/office/drawing/2010/main" Requires="a14">
+      <mc:AlternateContent xmlns:mc="http://schemas.openxmlformats.org/markup-compatibility/2006" xmlns:a14="http://schemas.microsoft.com/office/drawing/2010/main">
+        <mc:Choice Requires="a14">
           <p:sp>
             <p:nvSpPr>
               <p:cNvPr id="3" name="Content Placeholder 2">
@@ -20905,7 +21235,7 @@
             </p:txBody>
           </p:sp>
         </mc:Choice>
-        <mc:Fallback>
+        <mc:Fallback xmlns="">
           <p:sp>
             <p:nvSpPr>
               <p:cNvPr id="3" name="Content Placeholder 2">
@@ -21485,7 +21815,7 @@
 </p:sld>
 </file>
 
-<file path=ppt/slides/slide7.xml><?xml version="1.0" encoding="utf-8"?>
+<file path=ppt/slides/slide8.xml><?xml version="1.0" encoding="utf-8"?>
 <p:sld xmlns:a="http://schemas.openxmlformats.org/drawingml/2006/main" xmlns:r="http://schemas.openxmlformats.org/officeDocument/2006/relationships" xmlns:p="http://schemas.openxmlformats.org/presentationml/2006/main">
   <p:cSld>
     <p:spTree>
@@ -21714,7 +22044,7 @@
 </p:sld>
 </file>
 
-<file path=ppt/slides/slide8.xml><?xml version="1.0" encoding="utf-8"?>
+<file path=ppt/slides/slide9.xml><?xml version="1.0" encoding="utf-8"?>
 <p:sld xmlns:a="http://schemas.openxmlformats.org/drawingml/2006/main" xmlns:r="http://schemas.openxmlformats.org/officeDocument/2006/relationships" xmlns:p="http://schemas.openxmlformats.org/presentationml/2006/main">
   <p:cSld>
     <p:spTree>
@@ -22107,243 +22437,6 @@
 </p:sld>
 </file>
 
-<file path=ppt/slides/slide9.xml><?xml version="1.0" encoding="utf-8"?>
-<p:sld xmlns:a="http://schemas.openxmlformats.org/drawingml/2006/main" xmlns:r="http://schemas.openxmlformats.org/officeDocument/2006/relationships" xmlns:p="http://schemas.openxmlformats.org/presentationml/2006/main">
-  <p:cSld>
-    <p:spTree>
-      <p:nvGrpSpPr>
-        <p:cNvPr id="1" name=""/>
-        <p:cNvGrpSpPr/>
-        <p:nvPr/>
-      </p:nvGrpSpPr>
-      <p:grpSpPr>
-        <a:xfrm>
-          <a:off x="0" y="0"/>
-          <a:ext cx="0" cy="0"/>
-          <a:chOff x="0" y="0"/>
-          <a:chExt cx="0" cy="0"/>
-        </a:xfrm>
-      </p:grpSpPr>
-      <p:sp>
-        <p:nvSpPr>
-          <p:cNvPr id="2" name="Title 1">
-            <a:extLst>
-              <a:ext uri="{FF2B5EF4-FFF2-40B4-BE49-F238E27FC236}">
-                <a16:creationId xmlns:a16="http://schemas.microsoft.com/office/drawing/2014/main" id="{788C3E2A-D1FC-4F12-90D4-A3DA78E6CB13}"/>
-              </a:ext>
-            </a:extLst>
-          </p:cNvPr>
-          <p:cNvSpPr>
-            <a:spLocks noGrp="1"/>
-          </p:cNvSpPr>
-          <p:nvPr>
-            <p:ph type="title"/>
-          </p:nvPr>
-        </p:nvSpPr>
-        <p:spPr/>
-        <p:txBody>
-          <a:bodyPr/>
-          <a:lstStyle/>
-          <a:p>
-            <a:r>
-              <a:rPr lang="en-US" dirty="0"/>
-              <a:t>What are the similarities?</a:t>
-            </a:r>
-          </a:p>
-        </p:txBody>
-      </p:sp>
-      <p:sp>
-        <p:nvSpPr>
-          <p:cNvPr id="3" name="Content Placeholder 2">
-            <a:extLst>
-              <a:ext uri="{FF2B5EF4-FFF2-40B4-BE49-F238E27FC236}">
-                <a16:creationId xmlns:a16="http://schemas.microsoft.com/office/drawing/2014/main" id="{37DDEC3A-88A8-4B6E-89E5-C90DDFAC9D1E}"/>
-              </a:ext>
-            </a:extLst>
-          </p:cNvPr>
-          <p:cNvSpPr>
-            <a:spLocks noGrp="1"/>
-          </p:cNvSpPr>
-          <p:nvPr>
-            <p:ph idx="1"/>
-          </p:nvPr>
-        </p:nvSpPr>
-        <p:spPr/>
-        <p:txBody>
-          <a:bodyPr/>
-          <a:lstStyle/>
-          <a:p>
-            <a:r>
-              <a:rPr lang="en-US" dirty="0"/>
-              <a:t>Well, they all require direct comparisons along elements in the collection, so you’ll always have that linear term.</a:t>
-            </a:r>
-          </a:p>
-          <a:p>
-            <a:endParaRPr lang="en-US" dirty="0"/>
-          </a:p>
-          <a:p>
-            <a:r>
-              <a:rPr lang="en-US" dirty="0"/>
-              <a:t>Thus, we’ll regard this class of sorting algorithms as: </a:t>
-            </a:r>
-            <a:r>
-              <a:rPr lang="en-US" b="1" dirty="0"/>
-              <a:t>Comparison based</a:t>
-            </a:r>
-            <a:r>
-              <a:rPr lang="en-US" dirty="0"/>
-              <a:t>.</a:t>
-            </a:r>
-          </a:p>
-          <a:p>
-            <a:endParaRPr lang="en-US" dirty="0"/>
-          </a:p>
-        </p:txBody>
-      </p:sp>
-    </p:spTree>
-    <p:extLst>
-      <p:ext uri="{BB962C8B-B14F-4D97-AF65-F5344CB8AC3E}">
-        <p14:creationId xmlns:p14="http://schemas.microsoft.com/office/powerpoint/2010/main" val="2234172799"/>
-      </p:ext>
-    </p:extLst>
-  </p:cSld>
-  <p:clrMapOvr>
-    <a:masterClrMapping/>
-  </p:clrMapOvr>
-  <p:timing>
-    <p:tnLst>
-      <p:par>
-        <p:cTn id="1" dur="indefinite" restart="never" nodeType="tmRoot">
-          <p:childTnLst>
-            <p:seq concurrent="1" nextAc="seek">
-              <p:cTn id="2" dur="indefinite" nodeType="mainSeq">
-                <p:childTnLst>
-                  <p:par>
-                    <p:cTn id="3" fill="hold">
-                      <p:stCondLst>
-                        <p:cond delay="indefinite"/>
-                      </p:stCondLst>
-                      <p:childTnLst>
-                        <p:par>
-                          <p:cTn id="4" fill="hold">
-                            <p:stCondLst>
-                              <p:cond delay="0"/>
-                            </p:stCondLst>
-                            <p:childTnLst>
-                              <p:par>
-                                <p:cTn id="5" presetID="1" presetClass="entr" presetSubtype="0" fill="hold" grpId="0" nodeType="clickEffect">
-                                  <p:stCondLst>
-                                    <p:cond delay="0"/>
-                                  </p:stCondLst>
-                                  <p:childTnLst>
-                                    <p:set>
-                                      <p:cBhvr>
-                                        <p:cTn id="6" dur="1" fill="hold">
-                                          <p:stCondLst>
-                                            <p:cond delay="0"/>
-                                          </p:stCondLst>
-                                        </p:cTn>
-                                        <p:tgtEl>
-                                          <p:spTgt spid="3">
-                                            <p:txEl>
-                                              <p:pRg st="0" end="0"/>
-                                            </p:txEl>
-                                          </p:spTgt>
-                                        </p:tgtEl>
-                                        <p:attrNameLst>
-                                          <p:attrName>style.visibility</p:attrName>
-                                        </p:attrNameLst>
-                                      </p:cBhvr>
-                                      <p:to>
-                                        <p:strVal val="visible"/>
-                                      </p:to>
-                                    </p:set>
-                                  </p:childTnLst>
-                                </p:cTn>
-                              </p:par>
-                            </p:childTnLst>
-                          </p:cTn>
-                        </p:par>
-                      </p:childTnLst>
-                    </p:cTn>
-                  </p:par>
-                  <p:par>
-                    <p:cTn id="7" fill="hold">
-                      <p:stCondLst>
-                        <p:cond delay="indefinite"/>
-                      </p:stCondLst>
-                      <p:childTnLst>
-                        <p:par>
-                          <p:cTn id="8" fill="hold">
-                            <p:stCondLst>
-                              <p:cond delay="0"/>
-                            </p:stCondLst>
-                            <p:childTnLst>
-                              <p:par>
-                                <p:cTn id="9" presetID="1" presetClass="entr" presetSubtype="0" fill="hold" grpId="0" nodeType="clickEffect">
-                                  <p:stCondLst>
-                                    <p:cond delay="0"/>
-                                  </p:stCondLst>
-                                  <p:childTnLst>
-                                    <p:set>
-                                      <p:cBhvr>
-                                        <p:cTn id="10" dur="1" fill="hold">
-                                          <p:stCondLst>
-                                            <p:cond delay="0"/>
-                                          </p:stCondLst>
-                                        </p:cTn>
-                                        <p:tgtEl>
-                                          <p:spTgt spid="3">
-                                            <p:txEl>
-                                              <p:pRg st="2" end="2"/>
-                                            </p:txEl>
-                                          </p:spTgt>
-                                        </p:tgtEl>
-                                        <p:attrNameLst>
-                                          <p:attrName>style.visibility</p:attrName>
-                                        </p:attrNameLst>
-                                      </p:cBhvr>
-                                      <p:to>
-                                        <p:strVal val="visible"/>
-                                      </p:to>
-                                    </p:set>
-                                  </p:childTnLst>
-                                </p:cTn>
-                              </p:par>
-                            </p:childTnLst>
-                          </p:cTn>
-                        </p:par>
-                      </p:childTnLst>
-                    </p:cTn>
-                  </p:par>
-                </p:childTnLst>
-              </p:cTn>
-              <p:prevCondLst>
-                <p:cond evt="onPrev" delay="0">
-                  <p:tgtEl>
-                    <p:sldTgt/>
-                  </p:tgtEl>
-                </p:cond>
-              </p:prevCondLst>
-              <p:nextCondLst>
-                <p:cond evt="onNext" delay="0">
-                  <p:tgtEl>
-                    <p:sldTgt/>
-                  </p:tgtEl>
-                </p:cond>
-              </p:nextCondLst>
-            </p:seq>
-          </p:childTnLst>
-        </p:cTn>
-      </p:par>
-    </p:tnLst>
-    <p:bldLst>
-      <p:bldP spid="3" grpId="0" build="p"/>
-    </p:bldLst>
-  </p:timing>
-</p:sld>
-</file>
-
 <file path=ppt/theme/theme1.xml><?xml version="1.0" encoding="utf-8"?>
 <a:theme xmlns:a="http://schemas.openxmlformats.org/drawingml/2006/main" name="Mesh">
   <a:themeElements>
@@ -22601,15 +22694,6 @@
 </file>
 
 <file path=customXml/item1.xml><?xml version="1.0" encoding="utf-8"?>
-<?mso-contentType ?>
-<FormTemplates xmlns="http://schemas.microsoft.com/sharepoint/v3/contenttype/forms">
-  <Display>DocumentLibraryForm</Display>
-  <Edit>DocumentLibraryForm</Edit>
-  <New>DocumentLibraryForm</New>
-</FormTemplates>
-</file>
-
-<file path=customXml/item2.xml><?xml version="1.0" encoding="utf-8"?>
 <ct:contentTypeSchema xmlns:ct="http://schemas.microsoft.com/office/2006/metadata/contentType" xmlns:ma="http://schemas.microsoft.com/office/2006/metadata/properties/metaAttributes" ct:_="" ma:_="" ma:contentTypeName="Document" ma:contentTypeID="0x0101004651E360FFF8E045BC9E794BF0F8E060" ma:contentTypeVersion="4" ma:contentTypeDescription="Create a new document." ma:contentTypeScope="" ma:versionID="601fb0477c1a00ea6c9cdda8af407385">
   <xsd:schema xmlns:xsd="http://www.w3.org/2001/XMLSchema" xmlns:xs="http://www.w3.org/2001/XMLSchema" xmlns:p="http://schemas.microsoft.com/office/2006/metadata/properties" xmlns:ns3="b12b050b-08b8-4c9a-9e6b-d2ba71f76ee2" targetNamespace="http://schemas.microsoft.com/office/2006/metadata/properties" ma:root="true" ma:fieldsID="f3c9c52ccd6619c053e6551ce3886dd6" ns3:_="">
     <xsd:import namespace="b12b050b-08b8-4c9a-9e6b-d2ba71f76ee2"/>
@@ -22755,6 +22839,15 @@
 </ct:contentTypeSchema>
 </file>
 
+<file path=customXml/item2.xml><?xml version="1.0" encoding="utf-8"?>
+<?mso-contentType ?>
+<FormTemplates xmlns="http://schemas.microsoft.com/sharepoint/v3/contenttype/forms">
+  <Display>DocumentLibraryForm</Display>
+  <Edit>DocumentLibraryForm</Edit>
+  <New>DocumentLibraryForm</New>
+</FormTemplates>
+</file>
+
 <file path=customXml/item3.xml><?xml version="1.0" encoding="utf-8"?>
 <p:properties xmlns:p="http://schemas.microsoft.com/office/2006/metadata/properties" xmlns:xsi="http://www.w3.org/2001/XMLSchema-instance" xmlns:pc="http://schemas.microsoft.com/office/infopath/2007/PartnerControls">
   <documentManagement/>
@@ -22762,14 +22855,6 @@
 </file>
 
 <file path=customXml/itemProps1.xml><?xml version="1.0" encoding="utf-8"?>
-<ds:datastoreItem xmlns:ds="http://schemas.openxmlformats.org/officeDocument/2006/customXml" ds:itemID="{EAD6361B-42F3-4F16-BF0D-EEAD814363A9}">
-  <ds:schemaRefs>
-    <ds:schemaRef ds:uri="http://schemas.microsoft.com/sharepoint/v3/contenttype/forms"/>
-  </ds:schemaRefs>
-</ds:datastoreItem>
-</file>
-
-<file path=customXml/itemProps2.xml><?xml version="1.0" encoding="utf-8"?>
 <ds:datastoreItem xmlns:ds="http://schemas.openxmlformats.org/officeDocument/2006/customXml" ds:itemID="{12A8F262-ADEB-426B-9547-C1288F064D36}">
   <ds:schemaRefs>
     <ds:schemaRef ds:uri="http://schemas.microsoft.com/office/2006/metadata/contentType"/>
@@ -22787,18 +22872,26 @@
 </ds:datastoreItem>
 </file>
 
+<file path=customXml/itemProps2.xml><?xml version="1.0" encoding="utf-8"?>
+<ds:datastoreItem xmlns:ds="http://schemas.openxmlformats.org/officeDocument/2006/customXml" ds:itemID="{EAD6361B-42F3-4F16-BF0D-EEAD814363A9}">
+  <ds:schemaRefs>
+    <ds:schemaRef ds:uri="http://schemas.microsoft.com/sharepoint/v3/contenttype/forms"/>
+  </ds:schemaRefs>
+</ds:datastoreItem>
+</file>
+
 <file path=customXml/itemProps3.xml><?xml version="1.0" encoding="utf-8"?>
 <ds:datastoreItem xmlns:ds="http://schemas.openxmlformats.org/officeDocument/2006/customXml" ds:itemID="{71D625F4-66D5-475F-926E-637DA85674DA}">
   <ds:schemaRefs>
+    <ds:schemaRef ds:uri="b12b050b-08b8-4c9a-9e6b-d2ba71f76ee2"/>
+    <ds:schemaRef ds:uri="http://www.w3.org/XML/1998/namespace"/>
+    <ds:schemaRef ds:uri="http://schemas.openxmlformats.org/package/2006/metadata/core-properties"/>
+    <ds:schemaRef ds:uri="http://schemas.microsoft.com/office/2006/metadata/properties"/>
     <ds:schemaRef ds:uri="http://purl.org/dc/dcmitype/"/>
     <ds:schemaRef ds:uri="http://schemas.microsoft.com/office/2006/documentManagement/types"/>
-    <ds:schemaRef ds:uri="http://purl.org/dc/terms/"/>
-    <ds:schemaRef ds:uri="http://www.w3.org/XML/1998/namespace"/>
     <ds:schemaRef ds:uri="http://purl.org/dc/elements/1.1/"/>
     <ds:schemaRef ds:uri="http://schemas.microsoft.com/office/infopath/2007/PartnerControls"/>
-    <ds:schemaRef ds:uri="http://schemas.openxmlformats.org/package/2006/metadata/core-properties"/>
-    <ds:schemaRef ds:uri="b12b050b-08b8-4c9a-9e6b-d2ba71f76ee2"/>
-    <ds:schemaRef ds:uri="http://schemas.microsoft.com/office/2006/metadata/properties"/>
+    <ds:schemaRef ds:uri="http://purl.org/dc/terms/"/>
   </ds:schemaRefs>
 </ds:datastoreItem>
 </file>
--- a/files/CS1501/CS_1501_Slides_1.pptx
+++ b/files/CS1501/CS_1501_Slides_1.pptx
@@ -11643,7 +11643,7 @@
         </p:nvSpPr>
         <p:spPr>
           <a:xfrm>
-            <a:off x="1145551" y="1763567"/>
+            <a:off x="287600" y="2226784"/>
             <a:ext cx="9905998" cy="3124201"/>
           </a:xfrm>
         </p:spPr>
@@ -11814,7 +11814,7 @@
         </p:blipFill>
         <p:spPr bwMode="auto">
           <a:xfrm>
-            <a:off x="2904349" y="2876721"/>
+            <a:off x="2914354" y="3052890"/>
             <a:ext cx="993140" cy="993140"/>
           </a:xfrm>
           <a:prstGeom prst="rect">
@@ -11853,7 +11853,7 @@
         </p:blipFill>
         <p:spPr bwMode="auto">
           <a:xfrm>
-            <a:off x="5403769" y="2879043"/>
+            <a:off x="5413774" y="3055212"/>
             <a:ext cx="993140" cy="993140"/>
           </a:xfrm>
           <a:prstGeom prst="rect">
@@ -11892,7 +11892,7 @@
         </p:blipFill>
         <p:spPr bwMode="auto">
           <a:xfrm>
-            <a:off x="7903189" y="2876721"/>
+            <a:off x="7913194" y="3052890"/>
             <a:ext cx="993140" cy="993140"/>
           </a:xfrm>
           <a:prstGeom prst="rect">
@@ -11918,7 +11918,7 @@
         </p:nvSpPr>
         <p:spPr>
           <a:xfrm>
-            <a:off x="5331262" y="4065515"/>
+            <a:off x="5341267" y="4241684"/>
             <a:ext cx="1178921" cy="646331"/>
           </a:xfrm>
           <a:prstGeom prst="rect">
@@ -11953,7 +11953,7 @@
         </p:nvSpPr>
         <p:spPr>
           <a:xfrm>
-            <a:off x="1427219" y="4744405"/>
+            <a:off x="1437224" y="4920574"/>
             <a:ext cx="3324168" cy="646331"/>
           </a:xfrm>
           <a:prstGeom prst="rect">
@@ -11988,8 +11988,8 @@
         </p:nvSpPr>
         <p:spPr>
           <a:xfrm>
-            <a:off x="2106351" y="5746459"/>
-            <a:ext cx="7114448" cy="646331"/>
+            <a:off x="2116356" y="5922628"/>
+            <a:ext cx="7071167" cy="646331"/>
           </a:xfrm>
           <a:prstGeom prst="rect">
             <a:avLst/>
@@ -12004,7 +12004,7 @@
           <a:p>
             <a:r>
               <a:rPr lang="en-US" dirty="0"/>
-              <a:t>[003, 	012, 	023, 	103, 	113, 	121, 	200, 	212]</a:t>
+              <a:t>[003, 	012, 		023, 		103, 		113, 		121, 		200, 		212]</a:t>
             </a:r>
           </a:p>
           <a:p>
@@ -12026,8 +12026,8 @@
         </p:nvSpPr>
         <p:spPr>
           <a:xfrm>
-            <a:off x="3116225" y="3590276"/>
-            <a:ext cx="569387" cy="369332"/>
+            <a:off x="3126230" y="3766445"/>
+            <a:ext cx="530915" cy="369332"/>
           </a:xfrm>
           <a:prstGeom prst="rect">
             <a:avLst/>
@@ -12041,7 +12041,11 @@
           <a:lstStyle/>
           <a:p>
             <a:r>
-              <a:rPr lang="en-US" dirty="0"/>
+              <a:rPr lang="en-US" dirty="0">
+                <a:solidFill>
+                  <a:schemeClr val="bg1"/>
+                </a:solidFill>
+              </a:rPr>
               <a:t>003</a:t>
             </a:r>
           </a:p>
@@ -12061,7 +12065,7 @@
         </p:nvSpPr>
         <p:spPr>
           <a:xfrm>
-            <a:off x="2904348" y="4063516"/>
+            <a:off x="2914353" y="4239685"/>
             <a:ext cx="1191401" cy="646331"/>
           </a:xfrm>
           <a:prstGeom prst="rect">
@@ -12096,7 +12100,7 @@
         </p:nvSpPr>
         <p:spPr>
           <a:xfrm>
-            <a:off x="7804059" y="4055649"/>
+            <a:off x="7814064" y="4231818"/>
             <a:ext cx="1191400" cy="646331"/>
           </a:xfrm>
           <a:prstGeom prst="rect">
@@ -12133,7 +12137,7 @@
         </p:nvCxnSpPr>
         <p:spPr>
           <a:xfrm flipH="1">
-            <a:off x="3500048" y="2373753"/>
+            <a:off x="3510053" y="2549922"/>
             <a:ext cx="542353" cy="1334040"/>
           </a:xfrm>
           <a:prstGeom prst="straightConnector1">
@@ -12174,7 +12178,7 @@
         </p:nvCxnSpPr>
         <p:spPr>
           <a:xfrm flipH="1">
-            <a:off x="3400918" y="2348398"/>
+            <a:off x="3410923" y="2524567"/>
             <a:ext cx="1646062" cy="1040746"/>
           </a:xfrm>
           <a:prstGeom prst="straightConnector1">
@@ -12216,8 +12220,8 @@
         </p:nvSpPr>
         <p:spPr>
           <a:xfrm>
-            <a:off x="3116225" y="3260170"/>
-            <a:ext cx="569387" cy="369332"/>
+            <a:off x="3126230" y="3436339"/>
+            <a:ext cx="530915" cy="369332"/>
           </a:xfrm>
           <a:prstGeom prst="rect">
             <a:avLst/>
@@ -12231,7 +12235,11 @@
           <a:lstStyle/>
           <a:p>
             <a:r>
-              <a:rPr lang="en-US" dirty="0"/>
+              <a:rPr lang="en-US" dirty="0">
+                <a:solidFill>
+                  <a:schemeClr val="bg1"/>
+                </a:solidFill>
+              </a:rPr>
               <a:t>012</a:t>
             </a:r>
           </a:p>
@@ -12251,8 +12259,8 @@
         </p:nvSpPr>
         <p:spPr>
           <a:xfrm>
-            <a:off x="3110906" y="2966062"/>
-            <a:ext cx="569387" cy="369332"/>
+            <a:off x="3120911" y="3142231"/>
+            <a:ext cx="530915" cy="369332"/>
           </a:xfrm>
           <a:prstGeom prst="rect">
             <a:avLst/>
@@ -12266,7 +12274,11 @@
           <a:lstStyle/>
           <a:p>
             <a:r>
-              <a:rPr lang="en-US" dirty="0"/>
+              <a:rPr lang="en-US" dirty="0">
+                <a:solidFill>
+                  <a:schemeClr val="bg1"/>
+                </a:solidFill>
+              </a:rPr>
               <a:t>023</a:t>
             </a:r>
           </a:p>
@@ -12288,7 +12300,7 @@
         </p:nvCxnSpPr>
         <p:spPr>
           <a:xfrm flipH="1">
-            <a:off x="3495910" y="2358889"/>
+            <a:off x="3505915" y="2535058"/>
             <a:ext cx="5267090" cy="681884"/>
           </a:xfrm>
           <a:prstGeom prst="straightConnector1">
@@ -12330,8 +12342,8 @@
         </p:nvSpPr>
         <p:spPr>
           <a:xfrm>
-            <a:off x="5614640" y="3562547"/>
-            <a:ext cx="569387" cy="369332"/>
+            <a:off x="5624645" y="3738716"/>
+            <a:ext cx="530915" cy="369332"/>
           </a:xfrm>
           <a:prstGeom prst="rect">
             <a:avLst/>
@@ -12345,7 +12357,11 @@
           <a:lstStyle/>
           <a:p>
             <a:r>
-              <a:rPr lang="en-US" dirty="0"/>
+              <a:rPr lang="en-US" dirty="0">
+                <a:solidFill>
+                  <a:schemeClr val="bg1"/>
+                </a:solidFill>
+              </a:rPr>
               <a:t>103</a:t>
             </a:r>
           </a:p>
@@ -12368,8 +12384,8 @@
         </p:nvCxnSpPr>
         <p:spPr>
           <a:xfrm>
-            <a:off x="3326091" y="2557049"/>
-            <a:ext cx="2288549" cy="1190164"/>
+            <a:off x="3395416" y="2543012"/>
+            <a:ext cx="2229229" cy="1380370"/>
           </a:xfrm>
           <a:prstGeom prst="straightConnector1">
             <a:avLst/>
@@ -12412,7 +12428,7 @@
         </p:nvCxnSpPr>
         <p:spPr>
           <a:xfrm flipH="1">
-            <a:off x="6078029" y="2447059"/>
+            <a:off x="6088034" y="2623228"/>
             <a:ext cx="871131" cy="823210"/>
           </a:xfrm>
           <a:prstGeom prst="straightConnector1">
@@ -12454,8 +12470,8 @@
         </p:nvSpPr>
         <p:spPr>
           <a:xfrm>
-            <a:off x="5628924" y="3229742"/>
-            <a:ext cx="569387" cy="369332"/>
+            <a:off x="5638929" y="3405911"/>
+            <a:ext cx="530915" cy="369332"/>
           </a:xfrm>
           <a:prstGeom prst="rect">
             <a:avLst/>
@@ -12469,7 +12485,11 @@
           <a:lstStyle/>
           <a:p>
             <a:r>
-              <a:rPr lang="en-US" dirty="0"/>
+              <a:rPr lang="en-US" dirty="0">
+                <a:solidFill>
+                  <a:schemeClr val="bg1"/>
+                </a:solidFill>
+              </a:rPr>
               <a:t>113</a:t>
             </a:r>
           </a:p>
@@ -12491,7 +12511,7 @@
         </p:nvCxnSpPr>
         <p:spPr>
           <a:xfrm flipH="1">
-            <a:off x="6085995" y="2308287"/>
+            <a:off x="6096000" y="2484456"/>
             <a:ext cx="1784012" cy="751554"/>
           </a:xfrm>
           <a:prstGeom prst="straightConnector1">
@@ -12533,8 +12553,8 @@
         </p:nvSpPr>
         <p:spPr>
           <a:xfrm>
-            <a:off x="5619029" y="2867215"/>
-            <a:ext cx="569387" cy="369332"/>
+            <a:off x="5629034" y="3043384"/>
+            <a:ext cx="530915" cy="369332"/>
           </a:xfrm>
           <a:prstGeom prst="rect">
             <a:avLst/>
@@ -12548,7 +12568,11 @@
           <a:lstStyle/>
           <a:p>
             <a:r>
-              <a:rPr lang="en-US" dirty="0"/>
+              <a:rPr lang="en-US" dirty="0">
+                <a:solidFill>
+                  <a:schemeClr val="bg1"/>
+                </a:solidFill>
+              </a:rPr>
               <a:t>121</a:t>
             </a:r>
           </a:p>
@@ -12571,7 +12595,7 @@
         </p:nvCxnSpPr>
         <p:spPr>
           <a:xfrm>
-            <a:off x="2647517" y="2408050"/>
+            <a:off x="2657522" y="2584219"/>
             <a:ext cx="5465538" cy="1175316"/>
           </a:xfrm>
           <a:prstGeom prst="straightConnector1">
@@ -12613,8 +12637,8 @@
         </p:nvSpPr>
         <p:spPr>
           <a:xfrm>
-            <a:off x="8113055" y="3398700"/>
-            <a:ext cx="569387" cy="369332"/>
+            <a:off x="8123060" y="3574869"/>
+            <a:ext cx="530915" cy="369332"/>
           </a:xfrm>
           <a:prstGeom prst="rect">
             <a:avLst/>
@@ -12628,7 +12652,11 @@
           <a:lstStyle/>
           <a:p>
             <a:r>
-              <a:rPr lang="en-US" dirty="0"/>
+              <a:rPr lang="en-US" dirty="0">
+                <a:solidFill>
+                  <a:schemeClr val="bg1"/>
+                </a:solidFill>
+              </a:rPr>
               <a:t>200</a:t>
             </a:r>
           </a:p>
@@ -12650,7 +12678,7 @@
         </p:nvCxnSpPr>
         <p:spPr>
           <a:xfrm>
-            <a:off x="5971429" y="2361914"/>
+            <a:off x="5981434" y="2538083"/>
             <a:ext cx="2174808" cy="930412"/>
           </a:xfrm>
           <a:prstGeom prst="straightConnector1">
@@ -12692,8 +12720,8 @@
         </p:nvSpPr>
         <p:spPr>
           <a:xfrm>
-            <a:off x="8113055" y="3108979"/>
-            <a:ext cx="569387" cy="369332"/>
+            <a:off x="8123060" y="3285148"/>
+            <a:ext cx="530915" cy="369332"/>
           </a:xfrm>
           <a:prstGeom prst="rect">
             <a:avLst/>
@@ -12707,7 +12735,11 @@
           <a:lstStyle/>
           <a:p>
             <a:r>
-              <a:rPr lang="en-US" dirty="0"/>
+              <a:rPr lang="en-US" dirty="0">
+                <a:solidFill>
+                  <a:schemeClr val="bg1"/>
+                </a:solidFill>
+              </a:rPr>
               <a:t>212</a:t>
             </a:r>
           </a:p>
@@ -12729,7 +12761,7 @@
         </p:nvCxnSpPr>
         <p:spPr>
           <a:xfrm flipH="1">
-            <a:off x="2568554" y="3848899"/>
+            <a:off x="2578559" y="4025068"/>
             <a:ext cx="706618" cy="2022192"/>
           </a:xfrm>
           <a:prstGeom prst="straightConnector1">
@@ -12771,8 +12803,8 @@
         </p:nvCxnSpPr>
         <p:spPr>
           <a:xfrm flipH="1">
-            <a:off x="3326093" y="3629502"/>
-            <a:ext cx="74826" cy="2176611"/>
+            <a:off x="3336098" y="3805671"/>
+            <a:ext cx="55590" cy="2176611"/>
           </a:xfrm>
           <a:prstGeom prst="straightConnector1">
             <a:avLst/>
@@ -12816,8 +12848,8 @@
         </p:nvCxnSpPr>
         <p:spPr>
           <a:xfrm>
-            <a:off x="3680293" y="3150728"/>
-            <a:ext cx="476449" cy="2615508"/>
+            <a:off x="3651826" y="3326897"/>
+            <a:ext cx="514921" cy="2615508"/>
           </a:xfrm>
           <a:prstGeom prst="straightConnector1">
             <a:avLst/>
@@ -12860,7 +12892,7 @@
         </p:nvCxnSpPr>
         <p:spPr>
           <a:xfrm flipH="1">
-            <a:off x="5103711" y="3858571"/>
+            <a:off x="5113716" y="4034740"/>
             <a:ext cx="840054" cy="1947542"/>
           </a:xfrm>
           <a:prstGeom prst="straightConnector1">
@@ -12904,7 +12936,7 @@
         </p:nvCxnSpPr>
         <p:spPr>
           <a:xfrm flipH="1">
-            <a:off x="6074618" y="3548539"/>
+            <a:off x="6084623" y="3724708"/>
             <a:ext cx="54837" cy="2272608"/>
           </a:xfrm>
           <a:prstGeom prst="straightConnector1">
@@ -12948,7 +12980,7 @@
         </p:nvCxnSpPr>
         <p:spPr>
           <a:xfrm>
-            <a:off x="5971429" y="3119493"/>
+            <a:off x="5981434" y="3295662"/>
             <a:ext cx="942022" cy="2667194"/>
           </a:xfrm>
           <a:prstGeom prst="straightConnector1">
@@ -12993,8 +13025,8 @@
         </p:nvCxnSpPr>
         <p:spPr>
           <a:xfrm flipH="1">
-            <a:off x="7903189" y="3768032"/>
-            <a:ext cx="494560" cy="1998204"/>
+            <a:off x="7913194" y="3944201"/>
+            <a:ext cx="475324" cy="1998204"/>
           </a:xfrm>
           <a:prstGeom prst="straightConnector1">
             <a:avLst/>
@@ -13037,7 +13069,7 @@
         </p:nvCxnSpPr>
         <p:spPr>
           <a:xfrm>
-            <a:off x="8661618" y="3356074"/>
+            <a:off x="8671623" y="3532243"/>
             <a:ext cx="234711" cy="2450039"/>
           </a:xfrm>
           <a:prstGeom prst="straightConnector1">
@@ -13079,7 +13111,7 @@
         </p:nvSpPr>
         <p:spPr>
           <a:xfrm>
-            <a:off x="8896329" y="6258815"/>
+            <a:off x="8906334" y="6434984"/>
             <a:ext cx="3167466" cy="369332"/>
           </a:xfrm>
           <a:prstGeom prst="rect">
@@ -13102,10 +13134,10 @@
       </p:sp>
       <p:pic>
         <p:nvPicPr>
-          <p:cNvPr id="4" name="Picture 3">
+          <p:cNvPr id="7" name="Picture 6">
             <a:extLst>
               <a:ext uri="{FF2B5EF4-FFF2-40B4-BE49-F238E27FC236}">
-                <a16:creationId xmlns:a16="http://schemas.microsoft.com/office/drawing/2014/main" id="{D065F45B-98E3-440B-9B88-8F4D9C55E6CB}"/>
+                <a16:creationId xmlns:a16="http://schemas.microsoft.com/office/drawing/2014/main" id="{8B39CDC7-60E3-433E-BA64-85E9E245E942}"/>
               </a:ext>
             </a:extLst>
           </p:cNvPr>
@@ -13122,8 +13154,8 @@
         </p:blipFill>
         <p:spPr>
           <a:xfrm>
-            <a:off x="14452" y="62006"/>
-            <a:ext cx="12177548" cy="6795993"/>
+            <a:off x="50045" y="0"/>
+            <a:ext cx="12091910" cy="6858000"/>
           </a:xfrm>
           <a:prstGeom prst="rect">
             <a:avLst/>
@@ -13161,28 +13193,20 @@
                             </p:stCondLst>
                             <p:childTnLst>
                               <p:par>
-                                <p:cTn id="5" presetID="10" presetClass="exit" presetSubtype="0" fill="hold" nodeType="clickEffect">
+                                <p:cTn id="5" presetID="1" presetClass="exit" presetSubtype="0" fill="hold" nodeType="clickEffect">
                                   <p:stCondLst>
                                     <p:cond delay="0"/>
                                   </p:stCondLst>
                                   <p:childTnLst>
-                                    <p:animEffect transition="out" filter="fade">
-                                      <p:cBhvr>
-                                        <p:cTn id="6" dur="500"/>
-                                        <p:tgtEl>
-                                          <p:spTgt spid="4"/>
-                                        </p:tgtEl>
-                                      </p:cBhvr>
-                                    </p:animEffect>
                                     <p:set>
                                       <p:cBhvr>
-                                        <p:cTn id="7" dur="1" fill="hold">
+                                        <p:cTn id="6" dur="1" fill="hold">
                                           <p:stCondLst>
-                                            <p:cond delay="499"/>
+                                            <p:cond delay="0"/>
                                           </p:stCondLst>
                                         </p:cTn>
                                         <p:tgtEl>
-                                          <p:spTgt spid="4"/>
+                                          <p:spTgt spid="7"/>
                                         </p:tgtEl>
                                         <p:attrNameLst>
                                           <p:attrName>style.visibility</p:attrName>
@@ -13202,19 +13226,19 @@
                     </p:cTn>
                   </p:par>
                   <p:par>
-                    <p:cTn id="8" fill="hold">
+                    <p:cTn id="7" fill="hold">
                       <p:stCondLst>
                         <p:cond delay="indefinite"/>
                       </p:stCondLst>
                       <p:childTnLst>
                         <p:par>
-                          <p:cTn id="9" fill="hold">
+                          <p:cTn id="8" fill="hold">
                             <p:stCondLst>
                               <p:cond delay="0"/>
                             </p:stCondLst>
                             <p:childTnLst>
                               <p:par>
-                                <p:cTn id="10" presetID="1" presetClass="entr" presetSubtype="0" fill="hold" grpId="0" nodeType="clickEffect">
+                                <p:cTn id="9" presetID="1" presetClass="entr" presetSubtype="0" fill="hold" grpId="0" nodeType="clickEffect">
                                   <p:stCondLst>
                                     <p:cond delay="0"/>
                                   </p:stCondLst>
@@ -13224,7 +13248,7 @@
                                   <p:childTnLst>
                                     <p:set>
                                       <p:cBhvr>
-                                        <p:cTn id="11" dur="1" fill="hold">
+                                        <p:cTn id="10" dur="1" fill="hold">
                                           <p:stCondLst>
                                             <p:cond delay="0"/>
                                           </p:stCondLst>
@@ -13254,26 +13278,26 @@
                     </p:cTn>
                   </p:par>
                   <p:par>
-                    <p:cTn id="12" fill="hold">
+                    <p:cTn id="11" fill="hold">
                       <p:stCondLst>
                         <p:cond delay="indefinite"/>
                       </p:stCondLst>
                       <p:childTnLst>
                         <p:par>
-                          <p:cTn id="13" fill="hold">
+                          <p:cTn id="12" fill="hold">
                             <p:stCondLst>
                               <p:cond delay="0"/>
                             </p:stCondLst>
                             <p:childTnLst>
                               <p:par>
-                                <p:cTn id="14" presetID="1" presetClass="entr" presetSubtype="0" fill="hold" nodeType="clickEffect">
+                                <p:cTn id="13" presetID="1" presetClass="entr" presetSubtype="0" fill="hold" nodeType="clickEffect">
                                   <p:stCondLst>
                                     <p:cond delay="0"/>
                                   </p:stCondLst>
                                   <p:childTnLst>
                                     <p:set>
                                       <p:cBhvr>
-                                        <p:cTn id="15" dur="1" fill="hold">
+                                        <p:cTn id="14" dur="1" fill="hold">
                                           <p:stCondLst>
                                             <p:cond delay="0"/>
                                           </p:stCondLst>
@@ -13299,26 +13323,26 @@
                     </p:cTn>
                   </p:par>
                   <p:par>
-                    <p:cTn id="16" fill="hold">
+                    <p:cTn id="15" fill="hold">
                       <p:stCondLst>
                         <p:cond delay="indefinite"/>
                       </p:stCondLst>
                       <p:childTnLst>
                         <p:par>
-                          <p:cTn id="17" fill="hold">
+                          <p:cTn id="16" fill="hold">
                             <p:stCondLst>
                               <p:cond delay="0"/>
                             </p:stCondLst>
                             <p:childTnLst>
                               <p:par>
-                                <p:cTn id="18" presetID="1" presetClass="entr" presetSubtype="0" fill="hold" grpId="0" nodeType="clickEffect">
+                                <p:cTn id="17" presetID="1" presetClass="entr" presetSubtype="0" fill="hold" grpId="0" nodeType="clickEffect">
                                   <p:stCondLst>
                                     <p:cond delay="0"/>
                                   </p:stCondLst>
                                   <p:childTnLst>
                                     <p:set>
                                       <p:cBhvr>
-                                        <p:cTn id="19" dur="1" fill="hold">
+                                        <p:cTn id="18" dur="1" fill="hold">
                                           <p:stCondLst>
                                             <p:cond delay="0"/>
                                           </p:stCondLst>
@@ -13344,26 +13368,26 @@
                     </p:cTn>
                   </p:par>
                   <p:par>
-                    <p:cTn id="20" fill="hold">
+                    <p:cTn id="19" fill="hold">
                       <p:stCondLst>
                         <p:cond delay="indefinite"/>
                       </p:stCondLst>
                       <p:childTnLst>
                         <p:par>
-                          <p:cTn id="21" fill="hold">
+                          <p:cTn id="20" fill="hold">
                             <p:stCondLst>
                               <p:cond delay="0"/>
                             </p:stCondLst>
                             <p:childTnLst>
                               <p:par>
-                                <p:cTn id="22" presetID="1" presetClass="entr" presetSubtype="0" fill="hold" nodeType="clickEffect">
+                                <p:cTn id="21" presetID="1" presetClass="entr" presetSubtype="0" fill="hold" nodeType="clickEffect">
                                   <p:stCondLst>
                                     <p:cond delay="0"/>
                                   </p:stCondLst>
                                   <p:childTnLst>
                                     <p:set>
                                       <p:cBhvr>
-                                        <p:cTn id="23" dur="1" fill="hold">
+                                        <p:cTn id="22" dur="1" fill="hold">
                                           <p:stCondLst>
                                             <p:cond delay="0"/>
                                           </p:stCondLst>
@@ -13389,26 +13413,26 @@
                     </p:cTn>
                   </p:par>
                   <p:par>
-                    <p:cTn id="24" fill="hold">
+                    <p:cTn id="23" fill="hold">
                       <p:stCondLst>
                         <p:cond delay="indefinite"/>
                       </p:stCondLst>
                       <p:childTnLst>
                         <p:par>
-                          <p:cTn id="25" fill="hold">
+                          <p:cTn id="24" fill="hold">
                             <p:stCondLst>
                               <p:cond delay="0"/>
                             </p:stCondLst>
                             <p:childTnLst>
                               <p:par>
-                                <p:cTn id="26" presetID="1" presetClass="entr" presetSubtype="0" fill="hold" grpId="0" nodeType="clickEffect">
+                                <p:cTn id="25" presetID="1" presetClass="entr" presetSubtype="0" fill="hold" grpId="0" nodeType="clickEffect">
                                   <p:stCondLst>
                                     <p:cond delay="0"/>
                                   </p:stCondLst>
                                   <p:childTnLst>
                                     <p:set>
                                       <p:cBhvr>
-                                        <p:cTn id="27" dur="1" fill="hold">
+                                        <p:cTn id="26" dur="1" fill="hold">
                                           <p:stCondLst>
                                             <p:cond delay="0"/>
                                           </p:stCondLst>
@@ -13434,26 +13458,26 @@
                     </p:cTn>
                   </p:par>
                   <p:par>
-                    <p:cTn id="28" fill="hold">
+                    <p:cTn id="27" fill="hold">
                       <p:stCondLst>
                         <p:cond delay="indefinite"/>
                       </p:stCondLst>
                       <p:childTnLst>
                         <p:par>
-                          <p:cTn id="29" fill="hold">
+                          <p:cTn id="28" fill="hold">
                             <p:stCondLst>
                               <p:cond delay="0"/>
                             </p:stCondLst>
                             <p:childTnLst>
                               <p:par>
-                                <p:cTn id="30" presetID="1" presetClass="entr" presetSubtype="0" fill="hold" nodeType="clickEffect">
+                                <p:cTn id="29" presetID="1" presetClass="entr" presetSubtype="0" fill="hold" nodeType="clickEffect">
                                   <p:stCondLst>
                                     <p:cond delay="0"/>
                                   </p:stCondLst>
                                   <p:childTnLst>
                                     <p:set>
                                       <p:cBhvr>
-                                        <p:cTn id="31" dur="1" fill="hold">
+                                        <p:cTn id="30" dur="1" fill="hold">
                                           <p:stCondLst>
                                             <p:cond delay="0"/>
                                           </p:stCondLst>
@@ -13479,26 +13503,26 @@
                     </p:cTn>
                   </p:par>
                   <p:par>
-                    <p:cTn id="32" fill="hold">
+                    <p:cTn id="31" fill="hold">
                       <p:stCondLst>
                         <p:cond delay="indefinite"/>
                       </p:stCondLst>
                       <p:childTnLst>
                         <p:par>
-                          <p:cTn id="33" fill="hold">
+                          <p:cTn id="32" fill="hold">
                             <p:stCondLst>
                               <p:cond delay="0"/>
                             </p:stCondLst>
                             <p:childTnLst>
                               <p:par>
-                                <p:cTn id="34" presetID="1" presetClass="entr" presetSubtype="0" fill="hold" grpId="0" nodeType="clickEffect">
+                                <p:cTn id="33" presetID="1" presetClass="entr" presetSubtype="0" fill="hold" grpId="0" nodeType="clickEffect">
                                   <p:stCondLst>
                                     <p:cond delay="0"/>
                                   </p:stCondLst>
                                   <p:childTnLst>
                                     <p:set>
                                       <p:cBhvr>
-                                        <p:cTn id="35" dur="1" fill="hold">
+                                        <p:cTn id="34" dur="1" fill="hold">
                                           <p:stCondLst>
                                             <p:cond delay="0"/>
                                           </p:stCondLst>
@@ -13524,26 +13548,26 @@
                     </p:cTn>
                   </p:par>
                   <p:par>
-                    <p:cTn id="36" fill="hold">
+                    <p:cTn id="35" fill="hold">
                       <p:stCondLst>
                         <p:cond delay="indefinite"/>
                       </p:stCondLst>
                       <p:childTnLst>
                         <p:par>
-                          <p:cTn id="37" fill="hold">
+                          <p:cTn id="36" fill="hold">
                             <p:stCondLst>
                               <p:cond delay="0"/>
                             </p:stCondLst>
                             <p:childTnLst>
                               <p:par>
-                                <p:cTn id="38" presetID="1" presetClass="entr" presetSubtype="0" fill="hold" nodeType="clickEffect">
+                                <p:cTn id="37" presetID="1" presetClass="entr" presetSubtype="0" fill="hold" nodeType="clickEffect">
                                   <p:stCondLst>
                                     <p:cond delay="0"/>
                                   </p:stCondLst>
                                   <p:childTnLst>
                                     <p:set>
                                       <p:cBhvr>
-                                        <p:cTn id="39" dur="1" fill="hold">
+                                        <p:cTn id="38" dur="1" fill="hold">
                                           <p:stCondLst>
                                             <p:cond delay="0"/>
                                           </p:stCondLst>
@@ -13585,26 +13609,26 @@
                     </p:cTn>
                   </p:par>
                   <p:par>
-                    <p:cTn id="40" fill="hold">
+                    <p:cTn id="39" fill="hold">
                       <p:stCondLst>
                         <p:cond delay="indefinite"/>
                       </p:stCondLst>
                       <p:childTnLst>
                         <p:par>
-                          <p:cTn id="41" fill="hold">
+                          <p:cTn id="40" fill="hold">
                             <p:stCondLst>
                               <p:cond delay="0"/>
                             </p:stCondLst>
                             <p:childTnLst>
                               <p:par>
-                                <p:cTn id="42" presetID="1" presetClass="entr" presetSubtype="0" fill="hold" grpId="0" nodeType="clickEffect">
+                                <p:cTn id="41" presetID="1" presetClass="entr" presetSubtype="0" fill="hold" grpId="0" nodeType="clickEffect">
                                   <p:stCondLst>
                                     <p:cond delay="0"/>
                                   </p:stCondLst>
                                   <p:childTnLst>
                                     <p:set>
                                       <p:cBhvr>
-                                        <p:cTn id="43" dur="1" fill="hold">
+                                        <p:cTn id="42" dur="1" fill="hold">
                                           <p:stCondLst>
                                             <p:cond delay="0"/>
                                           </p:stCondLst>
@@ -13630,26 +13654,26 @@
                     </p:cTn>
                   </p:par>
                   <p:par>
-                    <p:cTn id="44" fill="hold">
+                    <p:cTn id="43" fill="hold">
                       <p:stCondLst>
                         <p:cond delay="indefinite"/>
                       </p:stCondLst>
                       <p:childTnLst>
                         <p:par>
-                          <p:cTn id="45" fill="hold">
+                          <p:cTn id="44" fill="hold">
                             <p:stCondLst>
                               <p:cond delay="0"/>
                             </p:stCondLst>
                             <p:childTnLst>
                               <p:par>
-                                <p:cTn id="46" presetID="1" presetClass="entr" presetSubtype="0" fill="hold" nodeType="clickEffect">
+                                <p:cTn id="45" presetID="1" presetClass="entr" presetSubtype="0" fill="hold" nodeType="clickEffect">
                                   <p:stCondLst>
                                     <p:cond delay="0"/>
                                   </p:stCondLst>
                                   <p:childTnLst>
                                     <p:set>
                                       <p:cBhvr>
-                                        <p:cTn id="47" dur="1" fill="hold">
+                                        <p:cTn id="46" dur="1" fill="hold">
                                           <p:stCondLst>
                                             <p:cond delay="0"/>
                                           </p:stCondLst>
@@ -13691,26 +13715,26 @@
                     </p:cTn>
                   </p:par>
                   <p:par>
-                    <p:cTn id="48" fill="hold">
+                    <p:cTn id="47" fill="hold">
                       <p:stCondLst>
                         <p:cond delay="indefinite"/>
                       </p:stCondLst>
                       <p:childTnLst>
                         <p:par>
-                          <p:cTn id="49" fill="hold">
+                          <p:cTn id="48" fill="hold">
                             <p:stCondLst>
                               <p:cond delay="0"/>
                             </p:stCondLst>
                             <p:childTnLst>
                               <p:par>
-                                <p:cTn id="50" presetID="1" presetClass="entr" presetSubtype="0" fill="hold" grpId="0" nodeType="clickEffect">
+                                <p:cTn id="49" presetID="1" presetClass="entr" presetSubtype="0" fill="hold" grpId="0" nodeType="clickEffect">
                                   <p:stCondLst>
                                     <p:cond delay="0"/>
                                   </p:stCondLst>
                                   <p:childTnLst>
                                     <p:set>
                                       <p:cBhvr>
-                                        <p:cTn id="51" dur="1" fill="hold">
+                                        <p:cTn id="50" dur="1" fill="hold">
                                           <p:stCondLst>
                                             <p:cond delay="0"/>
                                           </p:stCondLst>
@@ -13736,26 +13760,26 @@
                     </p:cTn>
                   </p:par>
                   <p:par>
-                    <p:cTn id="52" fill="hold">
+                    <p:cTn id="51" fill="hold">
                       <p:stCondLst>
                         <p:cond delay="indefinite"/>
                       </p:stCondLst>
                       <p:childTnLst>
                         <p:par>
-                          <p:cTn id="53" fill="hold">
+                          <p:cTn id="52" fill="hold">
                             <p:stCondLst>
                               <p:cond delay="0"/>
                             </p:stCondLst>
                             <p:childTnLst>
                               <p:par>
-                                <p:cTn id="54" presetID="1" presetClass="entr" presetSubtype="0" fill="hold" nodeType="clickEffect">
+                                <p:cTn id="53" presetID="1" presetClass="entr" presetSubtype="0" fill="hold" nodeType="clickEffect">
                                   <p:stCondLst>
                                     <p:cond delay="0"/>
                                   </p:stCondLst>
                                   <p:childTnLst>
                                     <p:set>
                                       <p:cBhvr>
-                                        <p:cTn id="55" dur="1" fill="hold">
+                                        <p:cTn id="54" dur="1" fill="hold">
                                           <p:stCondLst>
                                             <p:cond delay="0"/>
                                           </p:stCondLst>
@@ -13797,26 +13821,26 @@
                     </p:cTn>
                   </p:par>
                   <p:par>
-                    <p:cTn id="56" fill="hold">
+                    <p:cTn id="55" fill="hold">
                       <p:stCondLst>
                         <p:cond delay="indefinite"/>
                       </p:stCondLst>
                       <p:childTnLst>
                         <p:par>
-                          <p:cTn id="57" fill="hold">
+                          <p:cTn id="56" fill="hold">
                             <p:stCondLst>
                               <p:cond delay="0"/>
                             </p:stCondLst>
                             <p:childTnLst>
                               <p:par>
-                                <p:cTn id="58" presetID="1" presetClass="entr" presetSubtype="0" fill="hold" grpId="0" nodeType="clickEffect">
+                                <p:cTn id="57" presetID="1" presetClass="entr" presetSubtype="0" fill="hold" grpId="0" nodeType="clickEffect">
                                   <p:stCondLst>
                                     <p:cond delay="0"/>
                                   </p:stCondLst>
                                   <p:childTnLst>
                                     <p:set>
                                       <p:cBhvr>
-                                        <p:cTn id="59" dur="1" fill="hold">
+                                        <p:cTn id="58" dur="1" fill="hold">
                                           <p:stCondLst>
                                             <p:cond delay="0"/>
                                           </p:stCondLst>
@@ -13842,26 +13866,26 @@
                     </p:cTn>
                   </p:par>
                   <p:par>
-                    <p:cTn id="60" fill="hold">
+                    <p:cTn id="59" fill="hold">
                       <p:stCondLst>
                         <p:cond delay="indefinite"/>
                       </p:stCondLst>
                       <p:childTnLst>
                         <p:par>
-                          <p:cTn id="61" fill="hold">
+                          <p:cTn id="60" fill="hold">
                             <p:stCondLst>
                               <p:cond delay="0"/>
                             </p:stCondLst>
                             <p:childTnLst>
                               <p:par>
-                                <p:cTn id="62" presetID="1" presetClass="entr" presetSubtype="0" fill="hold" nodeType="clickEffect">
+                                <p:cTn id="61" presetID="1" presetClass="entr" presetSubtype="0" fill="hold" nodeType="clickEffect">
                                   <p:stCondLst>
                                     <p:cond delay="0"/>
                                   </p:stCondLst>
                                   <p:childTnLst>
                                     <p:set>
                                       <p:cBhvr>
-                                        <p:cTn id="63" dur="1" fill="hold">
+                                        <p:cTn id="62" dur="1" fill="hold">
                                           <p:stCondLst>
                                             <p:cond delay="0"/>
                                           </p:stCondLst>
@@ -13903,26 +13927,26 @@
                     </p:cTn>
                   </p:par>
                   <p:par>
-                    <p:cTn id="64" fill="hold">
+                    <p:cTn id="63" fill="hold">
                       <p:stCondLst>
                         <p:cond delay="indefinite"/>
                       </p:stCondLst>
                       <p:childTnLst>
                         <p:par>
-                          <p:cTn id="65" fill="hold">
+                          <p:cTn id="64" fill="hold">
                             <p:stCondLst>
                               <p:cond delay="0"/>
                             </p:stCondLst>
                             <p:childTnLst>
                               <p:par>
-                                <p:cTn id="66" presetID="1" presetClass="entr" presetSubtype="0" fill="hold" grpId="0" nodeType="clickEffect">
+                                <p:cTn id="65" presetID="1" presetClass="entr" presetSubtype="0" fill="hold" grpId="0" nodeType="clickEffect">
                                   <p:stCondLst>
                                     <p:cond delay="0"/>
                                   </p:stCondLst>
                                   <p:childTnLst>
                                     <p:set>
                                       <p:cBhvr>
-                                        <p:cTn id="67" dur="1" fill="hold">
+                                        <p:cTn id="66" dur="1" fill="hold">
                                           <p:stCondLst>
                                             <p:cond delay="0"/>
                                           </p:stCondLst>
@@ -13948,26 +13972,26 @@
                     </p:cTn>
                   </p:par>
                   <p:par>
-                    <p:cTn id="68" fill="hold">
+                    <p:cTn id="67" fill="hold">
                       <p:stCondLst>
                         <p:cond delay="indefinite"/>
                       </p:stCondLst>
                       <p:childTnLst>
                         <p:par>
-                          <p:cTn id="69" fill="hold">
+                          <p:cTn id="68" fill="hold">
                             <p:stCondLst>
                               <p:cond delay="0"/>
                             </p:stCondLst>
                             <p:childTnLst>
                               <p:par>
-                                <p:cTn id="70" presetID="1" presetClass="entr" presetSubtype="0" fill="hold" nodeType="clickEffect">
+                                <p:cTn id="69" presetID="1" presetClass="entr" presetSubtype="0" fill="hold" nodeType="clickEffect">
                                   <p:stCondLst>
                                     <p:cond delay="0"/>
                                   </p:stCondLst>
                                   <p:childTnLst>
                                     <p:set>
                                       <p:cBhvr>
-                                        <p:cTn id="71" dur="1" fill="hold">
+                                        <p:cTn id="70" dur="1" fill="hold">
                                           <p:stCondLst>
                                             <p:cond delay="0"/>
                                           </p:stCondLst>
@@ -14009,26 +14033,26 @@
                     </p:cTn>
                   </p:par>
                   <p:par>
-                    <p:cTn id="72" fill="hold">
+                    <p:cTn id="71" fill="hold">
                       <p:stCondLst>
                         <p:cond delay="indefinite"/>
                       </p:stCondLst>
                       <p:childTnLst>
                         <p:par>
-                          <p:cTn id="73" fill="hold">
+                          <p:cTn id="72" fill="hold">
                             <p:stCondLst>
                               <p:cond delay="0"/>
                             </p:stCondLst>
                             <p:childTnLst>
                               <p:par>
-                                <p:cTn id="74" presetID="1" presetClass="entr" presetSubtype="0" fill="hold" grpId="0" nodeType="clickEffect">
+                                <p:cTn id="73" presetID="1" presetClass="entr" presetSubtype="0" fill="hold" grpId="0" nodeType="clickEffect">
                                   <p:stCondLst>
                                     <p:cond delay="0"/>
                                   </p:stCondLst>
                                   <p:childTnLst>
                                     <p:set>
                                       <p:cBhvr>
-                                        <p:cTn id="75" dur="1" fill="hold">
+                                        <p:cTn id="74" dur="1" fill="hold">
                                           <p:stCondLst>
                                             <p:cond delay="0"/>
                                           </p:stCondLst>
@@ -14054,26 +14078,26 @@
                     </p:cTn>
                   </p:par>
                   <p:par>
-                    <p:cTn id="76" fill="hold">
+                    <p:cTn id="75" fill="hold">
                       <p:stCondLst>
                         <p:cond delay="indefinite"/>
                       </p:stCondLst>
                       <p:childTnLst>
                         <p:par>
-                          <p:cTn id="77" fill="hold">
+                          <p:cTn id="76" fill="hold">
                             <p:stCondLst>
                               <p:cond delay="0"/>
                             </p:stCondLst>
                             <p:childTnLst>
                               <p:par>
-                                <p:cTn id="78" presetID="1" presetClass="entr" presetSubtype="0" fill="hold" nodeType="clickEffect">
+                                <p:cTn id="77" presetID="1" presetClass="entr" presetSubtype="0" fill="hold" nodeType="clickEffect">
                                   <p:stCondLst>
                                     <p:cond delay="0"/>
                                   </p:stCondLst>
                                   <p:childTnLst>
                                     <p:set>
                                       <p:cBhvr>
-                                        <p:cTn id="79" dur="1" fill="hold">
+                                        <p:cTn id="78" dur="1" fill="hold">
                                           <p:stCondLst>
                                             <p:cond delay="0"/>
                                           </p:stCondLst>
@@ -14115,26 +14139,26 @@
                     </p:cTn>
                   </p:par>
                   <p:par>
-                    <p:cTn id="80" fill="hold">
+                    <p:cTn id="79" fill="hold">
                       <p:stCondLst>
                         <p:cond delay="indefinite"/>
                       </p:stCondLst>
                       <p:childTnLst>
                         <p:par>
-                          <p:cTn id="81" fill="hold">
+                          <p:cTn id="80" fill="hold">
                             <p:stCondLst>
                               <p:cond delay="0"/>
                             </p:stCondLst>
                             <p:childTnLst>
                               <p:par>
-                                <p:cTn id="82" presetID="1" presetClass="entr" presetSubtype="0" fill="hold" grpId="0" nodeType="clickEffect">
+                                <p:cTn id="81" presetID="1" presetClass="entr" presetSubtype="0" fill="hold" grpId="0" nodeType="clickEffect">
                                   <p:stCondLst>
                                     <p:cond delay="0"/>
                                   </p:stCondLst>
                                   <p:childTnLst>
                                     <p:set>
                                       <p:cBhvr>
-                                        <p:cTn id="83" dur="1" fill="hold">
+                                        <p:cTn id="82" dur="1" fill="hold">
                                           <p:stCondLst>
                                             <p:cond delay="0"/>
                                           </p:stCondLst>
@@ -14160,26 +14184,26 @@
                     </p:cTn>
                   </p:par>
                   <p:par>
-                    <p:cTn id="84" fill="hold">
+                    <p:cTn id="83" fill="hold">
                       <p:stCondLst>
                         <p:cond delay="indefinite"/>
                       </p:stCondLst>
                       <p:childTnLst>
                         <p:par>
-                          <p:cTn id="85" fill="hold">
+                          <p:cTn id="84" fill="hold">
                             <p:stCondLst>
                               <p:cond delay="0"/>
                             </p:stCondLst>
                             <p:childTnLst>
                               <p:par>
-                                <p:cTn id="86" presetID="1" presetClass="entr" presetSubtype="0" fill="hold" nodeType="clickEffect">
+                                <p:cTn id="85" presetID="1" presetClass="entr" presetSubtype="0" fill="hold" nodeType="clickEffect">
                                   <p:stCondLst>
                                     <p:cond delay="0"/>
                                   </p:stCondLst>
                                   <p:childTnLst>
                                     <p:set>
                                       <p:cBhvr>
-                                        <p:cTn id="87" dur="1" fill="hold">
+                                        <p:cTn id="86" dur="1" fill="hold">
                                           <p:stCondLst>
                                             <p:cond delay="0"/>
                                           </p:stCondLst>
@@ -14221,26 +14245,26 @@
                     </p:cTn>
                   </p:par>
                   <p:par>
-                    <p:cTn id="88" fill="hold">
+                    <p:cTn id="87" fill="hold">
                       <p:stCondLst>
                         <p:cond delay="indefinite"/>
                       </p:stCondLst>
                       <p:childTnLst>
                         <p:par>
-                          <p:cTn id="89" fill="hold">
+                          <p:cTn id="88" fill="hold">
                             <p:stCondLst>
                               <p:cond delay="0"/>
                             </p:stCondLst>
                             <p:childTnLst>
                               <p:par>
-                                <p:cTn id="90" presetID="1" presetClass="entr" presetSubtype="0" fill="hold" grpId="0" nodeType="clickEffect">
+                                <p:cTn id="89" presetID="1" presetClass="entr" presetSubtype="0" fill="hold" grpId="0" nodeType="clickEffect">
                                   <p:stCondLst>
                                     <p:cond delay="0"/>
                                   </p:stCondLst>
                                   <p:childTnLst>
                                     <p:set>
                                       <p:cBhvr>
-                                        <p:cTn id="91" dur="1" fill="hold">
+                                        <p:cTn id="90" dur="1" fill="hold">
                                           <p:stCondLst>
                                             <p:cond delay="0"/>
                                           </p:stCondLst>
@@ -14266,26 +14290,26 @@
                     </p:cTn>
                   </p:par>
                   <p:par>
-                    <p:cTn id="92" fill="hold">
+                    <p:cTn id="91" fill="hold">
                       <p:stCondLst>
                         <p:cond delay="indefinite"/>
                       </p:stCondLst>
                       <p:childTnLst>
                         <p:par>
-                          <p:cTn id="93" fill="hold">
+                          <p:cTn id="92" fill="hold">
                             <p:stCondLst>
                               <p:cond delay="0"/>
                             </p:stCondLst>
                             <p:childTnLst>
                               <p:par>
-                                <p:cTn id="94" presetID="1" presetClass="entr" presetSubtype="0" fill="hold" nodeType="clickEffect">
+                                <p:cTn id="93" presetID="1" presetClass="entr" presetSubtype="0" fill="hold" nodeType="clickEffect">
                                   <p:stCondLst>
                                     <p:cond delay="0"/>
                                   </p:stCondLst>
                                   <p:childTnLst>
                                     <p:set>
                                       <p:cBhvr>
-                                        <p:cTn id="95" dur="1" fill="hold">
+                                        <p:cTn id="94" dur="1" fill="hold">
                                           <p:stCondLst>
                                             <p:cond delay="0"/>
                                           </p:stCondLst>
@@ -14327,26 +14351,26 @@
                     </p:cTn>
                   </p:par>
                   <p:par>
-                    <p:cTn id="96" fill="hold">
+                    <p:cTn id="95" fill="hold">
                       <p:stCondLst>
                         <p:cond delay="indefinite"/>
                       </p:stCondLst>
                       <p:childTnLst>
                         <p:par>
-                          <p:cTn id="97" fill="hold">
+                          <p:cTn id="96" fill="hold">
                             <p:stCondLst>
                               <p:cond delay="0"/>
                             </p:stCondLst>
                             <p:childTnLst>
                               <p:par>
-                                <p:cTn id="98" presetID="1" presetClass="entr" presetSubtype="0" fill="hold" grpId="0" nodeType="clickEffect">
+                                <p:cTn id="97" presetID="1" presetClass="entr" presetSubtype="0" fill="hold" grpId="0" nodeType="clickEffect">
                                   <p:stCondLst>
                                     <p:cond delay="0"/>
                                   </p:stCondLst>
                                   <p:childTnLst>
                                     <p:set>
                                       <p:cBhvr>
-                                        <p:cTn id="99" dur="1" fill="hold">
+                                        <p:cTn id="98" dur="1" fill="hold">
                                           <p:stCondLst>
                                             <p:cond delay="0"/>
                                           </p:stCondLst>
@@ -14372,26 +14396,26 @@
                     </p:cTn>
                   </p:par>
                   <p:par>
-                    <p:cTn id="100" fill="hold">
+                    <p:cTn id="99" fill="hold">
                       <p:stCondLst>
                         <p:cond delay="indefinite"/>
                       </p:stCondLst>
                       <p:childTnLst>
                         <p:par>
-                          <p:cTn id="101" fill="hold">
+                          <p:cTn id="100" fill="hold">
                             <p:stCondLst>
                               <p:cond delay="0"/>
                             </p:stCondLst>
                             <p:childTnLst>
                               <p:par>
-                                <p:cTn id="102" presetID="1" presetClass="entr" presetSubtype="0" fill="hold" grpId="0" nodeType="clickEffect">
+                                <p:cTn id="101" presetID="1" presetClass="entr" presetSubtype="0" fill="hold" grpId="0" nodeType="clickEffect">
                                   <p:stCondLst>
                                     <p:cond delay="0"/>
                                   </p:stCondLst>
                                   <p:childTnLst>
                                     <p:set>
                                       <p:cBhvr>
-                                        <p:cTn id="103" dur="1" fill="hold">
+                                        <p:cTn id="102" dur="1" fill="hold">
                                           <p:stCondLst>
                                             <p:cond delay="0"/>
                                           </p:stCondLst>
@@ -14417,19 +14441,19 @@
                     </p:cTn>
                   </p:par>
                   <p:par>
-                    <p:cTn id="104" fill="hold">
+                    <p:cTn id="103" fill="hold">
                       <p:stCondLst>
                         <p:cond delay="indefinite"/>
                       </p:stCondLst>
                       <p:childTnLst>
                         <p:par>
-                          <p:cTn id="105" fill="hold">
+                          <p:cTn id="104" fill="hold">
                             <p:stCondLst>
                               <p:cond delay="0"/>
                             </p:stCondLst>
                             <p:childTnLst>
                               <p:par>
-                                <p:cTn id="106" presetID="1" presetClass="entr" presetSubtype="0" fill="hold" grpId="0" nodeType="clickEffect">
+                                <p:cTn id="105" presetID="1" presetClass="entr" presetSubtype="0" fill="hold" grpId="0" nodeType="clickEffect">
                                   <p:stCondLst>
                                     <p:cond delay="0"/>
                                   </p:stCondLst>
@@ -14439,7 +14463,7 @@
                                   <p:childTnLst>
                                     <p:set>
                                       <p:cBhvr>
-                                        <p:cTn id="107" dur="1" fill="hold">
+                                        <p:cTn id="106" dur="1" fill="hold">
                                           <p:stCondLst>
                                             <p:cond delay="0"/>
                                           </p:stCondLst>
@@ -14465,26 +14489,26 @@
                     </p:cTn>
                   </p:par>
                   <p:par>
-                    <p:cTn id="108" fill="hold">
+                    <p:cTn id="107" fill="hold">
                       <p:stCondLst>
                         <p:cond delay="indefinite"/>
                       </p:stCondLst>
                       <p:childTnLst>
                         <p:par>
-                          <p:cTn id="109" fill="hold">
+                          <p:cTn id="108" fill="hold">
                             <p:stCondLst>
                               <p:cond delay="0"/>
                             </p:stCondLst>
                             <p:childTnLst>
                               <p:par>
-                                <p:cTn id="110" presetID="1" presetClass="entr" presetSubtype="0" fill="hold" nodeType="clickEffect">
+                                <p:cTn id="109" presetID="1" presetClass="entr" presetSubtype="0" fill="hold" nodeType="clickEffect">
                                   <p:stCondLst>
                                     <p:cond delay="0"/>
                                   </p:stCondLst>
                                   <p:childTnLst>
                                     <p:set>
                                       <p:cBhvr>
-                                        <p:cTn id="111" dur="1" fill="hold">
+                                        <p:cTn id="110" dur="1" fill="hold">
                                           <p:stCondLst>
                                             <p:cond delay="0"/>
                                           </p:stCondLst>
@@ -14526,26 +14550,26 @@
                     </p:cTn>
                   </p:par>
                   <p:par>
-                    <p:cTn id="112" fill="hold">
+                    <p:cTn id="111" fill="hold">
                       <p:stCondLst>
                         <p:cond delay="indefinite"/>
                       </p:stCondLst>
                       <p:childTnLst>
                         <p:par>
-                          <p:cTn id="113" fill="hold">
+                          <p:cTn id="112" fill="hold">
                             <p:stCondLst>
                               <p:cond delay="0"/>
                             </p:stCondLst>
                             <p:childTnLst>
                               <p:par>
-                                <p:cTn id="114" presetID="1" presetClass="entr" presetSubtype="0" fill="hold" nodeType="clickEffect">
+                                <p:cTn id="113" presetID="1" presetClass="entr" presetSubtype="0" fill="hold" nodeType="clickEffect">
                                   <p:stCondLst>
                                     <p:cond delay="0"/>
                                   </p:stCondLst>
                                   <p:childTnLst>
                                     <p:set>
                                       <p:cBhvr>
-                                        <p:cTn id="115" dur="1" fill="hold">
+                                        <p:cTn id="114" dur="1" fill="hold">
                                           <p:stCondLst>
                                             <p:cond delay="0"/>
                                           </p:stCondLst>
@@ -14587,26 +14611,26 @@
                     </p:cTn>
                   </p:par>
                   <p:par>
-                    <p:cTn id="116" fill="hold">
+                    <p:cTn id="115" fill="hold">
                       <p:stCondLst>
                         <p:cond delay="indefinite"/>
                       </p:stCondLst>
                       <p:childTnLst>
                         <p:par>
-                          <p:cTn id="117" fill="hold">
+                          <p:cTn id="116" fill="hold">
                             <p:stCondLst>
                               <p:cond delay="0"/>
                             </p:stCondLst>
                             <p:childTnLst>
                               <p:par>
-                                <p:cTn id="118" presetID="1" presetClass="entr" presetSubtype="0" fill="hold" nodeType="clickEffect">
+                                <p:cTn id="117" presetID="1" presetClass="entr" presetSubtype="0" fill="hold" nodeType="clickEffect">
                                   <p:stCondLst>
                                     <p:cond delay="0"/>
                                   </p:stCondLst>
                                   <p:childTnLst>
                                     <p:set>
                                       <p:cBhvr>
-                                        <p:cTn id="119" dur="1" fill="hold">
+                                        <p:cTn id="118" dur="1" fill="hold">
                                           <p:stCondLst>
                                             <p:cond delay="0"/>
                                           </p:stCondLst>
@@ -14648,26 +14672,26 @@
                     </p:cTn>
                   </p:par>
                   <p:par>
-                    <p:cTn id="120" fill="hold">
+                    <p:cTn id="119" fill="hold">
                       <p:stCondLst>
                         <p:cond delay="indefinite"/>
                       </p:stCondLst>
                       <p:childTnLst>
                         <p:par>
-                          <p:cTn id="121" fill="hold">
+                          <p:cTn id="120" fill="hold">
                             <p:stCondLst>
                               <p:cond delay="0"/>
                             </p:stCondLst>
                             <p:childTnLst>
                               <p:par>
-                                <p:cTn id="122" presetID="1" presetClass="entr" presetSubtype="0" fill="hold" nodeType="clickEffect">
+                                <p:cTn id="121" presetID="1" presetClass="entr" presetSubtype="0" fill="hold" nodeType="clickEffect">
                                   <p:stCondLst>
                                     <p:cond delay="0"/>
                                   </p:stCondLst>
                                   <p:childTnLst>
                                     <p:set>
                                       <p:cBhvr>
-                                        <p:cTn id="123" dur="1" fill="hold">
+                                        <p:cTn id="122" dur="1" fill="hold">
                                           <p:stCondLst>
                                             <p:cond delay="0"/>
                                           </p:stCondLst>
@@ -14709,26 +14733,26 @@
                     </p:cTn>
                   </p:par>
                   <p:par>
-                    <p:cTn id="124" fill="hold">
+                    <p:cTn id="123" fill="hold">
                       <p:stCondLst>
                         <p:cond delay="indefinite"/>
                       </p:stCondLst>
                       <p:childTnLst>
                         <p:par>
-                          <p:cTn id="125" fill="hold">
+                          <p:cTn id="124" fill="hold">
                             <p:stCondLst>
                               <p:cond delay="0"/>
                             </p:stCondLst>
                             <p:childTnLst>
                               <p:par>
-                                <p:cTn id="126" presetID="1" presetClass="entr" presetSubtype="0" fill="hold" nodeType="clickEffect">
+                                <p:cTn id="125" presetID="1" presetClass="entr" presetSubtype="0" fill="hold" nodeType="clickEffect">
                                   <p:stCondLst>
                                     <p:cond delay="0"/>
                                   </p:stCondLst>
                                   <p:childTnLst>
                                     <p:set>
                                       <p:cBhvr>
-                                        <p:cTn id="127" dur="1" fill="hold">
+                                        <p:cTn id="126" dur="1" fill="hold">
                                           <p:stCondLst>
                                             <p:cond delay="0"/>
                                           </p:stCondLst>
@@ -14770,26 +14794,26 @@
                     </p:cTn>
                   </p:par>
                   <p:par>
-                    <p:cTn id="128" fill="hold">
+                    <p:cTn id="127" fill="hold">
                       <p:stCondLst>
                         <p:cond delay="indefinite"/>
                       </p:stCondLst>
                       <p:childTnLst>
                         <p:par>
-                          <p:cTn id="129" fill="hold">
+                          <p:cTn id="128" fill="hold">
                             <p:stCondLst>
                               <p:cond delay="0"/>
                             </p:stCondLst>
                             <p:childTnLst>
                               <p:par>
-                                <p:cTn id="130" presetID="1" presetClass="entr" presetSubtype="0" fill="hold" nodeType="clickEffect">
+                                <p:cTn id="129" presetID="1" presetClass="entr" presetSubtype="0" fill="hold" nodeType="clickEffect">
                                   <p:stCondLst>
                                     <p:cond delay="0"/>
                                   </p:stCondLst>
                                   <p:childTnLst>
                                     <p:set>
                                       <p:cBhvr>
-                                        <p:cTn id="131" dur="1" fill="hold">
+                                        <p:cTn id="130" dur="1" fill="hold">
                                           <p:stCondLst>
                                             <p:cond delay="0"/>
                                           </p:stCondLst>
@@ -14831,26 +14855,26 @@
                     </p:cTn>
                   </p:par>
                   <p:par>
-                    <p:cTn id="132" fill="hold">
+                    <p:cTn id="131" fill="hold">
                       <p:stCondLst>
                         <p:cond delay="indefinite"/>
                       </p:stCondLst>
                       <p:childTnLst>
                         <p:par>
-                          <p:cTn id="133" fill="hold">
+                          <p:cTn id="132" fill="hold">
                             <p:stCondLst>
                               <p:cond delay="0"/>
                             </p:stCondLst>
                             <p:childTnLst>
                               <p:par>
-                                <p:cTn id="134" presetID="1" presetClass="entr" presetSubtype="0" fill="hold" nodeType="clickEffect">
+                                <p:cTn id="133" presetID="1" presetClass="entr" presetSubtype="0" fill="hold" nodeType="clickEffect">
                                   <p:stCondLst>
                                     <p:cond delay="0"/>
                                   </p:stCondLst>
                                   <p:childTnLst>
                                     <p:set>
                                       <p:cBhvr>
-                                        <p:cTn id="135" dur="1" fill="hold">
+                                        <p:cTn id="134" dur="1" fill="hold">
                                           <p:stCondLst>
                                             <p:cond delay="0"/>
                                           </p:stCondLst>
@@ -14892,26 +14916,26 @@
                     </p:cTn>
                   </p:par>
                   <p:par>
-                    <p:cTn id="136" fill="hold">
+                    <p:cTn id="135" fill="hold">
                       <p:stCondLst>
                         <p:cond delay="indefinite"/>
                       </p:stCondLst>
                       <p:childTnLst>
                         <p:par>
-                          <p:cTn id="137" fill="hold">
+                          <p:cTn id="136" fill="hold">
                             <p:stCondLst>
                               <p:cond delay="0"/>
                             </p:stCondLst>
                             <p:childTnLst>
                               <p:par>
-                                <p:cTn id="138" presetID="1" presetClass="entr" presetSubtype="0" fill="hold" nodeType="clickEffect">
+                                <p:cTn id="137" presetID="1" presetClass="entr" presetSubtype="0" fill="hold" nodeType="clickEffect">
                                   <p:stCondLst>
                                     <p:cond delay="0"/>
                                   </p:stCondLst>
                                   <p:childTnLst>
                                     <p:set>
                                       <p:cBhvr>
-                                        <p:cTn id="139" dur="1" fill="hold">
+                                        <p:cTn id="138" dur="1" fill="hold">
                                           <p:stCondLst>
                                             <p:cond delay="0"/>
                                           </p:stCondLst>
@@ -14953,26 +14977,26 @@
                     </p:cTn>
                   </p:par>
                   <p:par>
-                    <p:cTn id="140" fill="hold">
+                    <p:cTn id="139" fill="hold">
                       <p:stCondLst>
                         <p:cond delay="indefinite"/>
                       </p:stCondLst>
                       <p:childTnLst>
                         <p:par>
-                          <p:cTn id="141" fill="hold">
+                          <p:cTn id="140" fill="hold">
                             <p:stCondLst>
                               <p:cond delay="0"/>
                             </p:stCondLst>
                             <p:childTnLst>
                               <p:par>
-                                <p:cTn id="142" presetID="1" presetClass="entr" presetSubtype="0" fill="hold" nodeType="clickEffect">
+                                <p:cTn id="141" presetID="1" presetClass="entr" presetSubtype="0" fill="hold" nodeType="clickEffect">
                                   <p:stCondLst>
                                     <p:cond delay="0"/>
                                   </p:stCondLst>
                                   <p:childTnLst>
                                     <p:set>
                                       <p:cBhvr>
-                                        <p:cTn id="143" dur="1" fill="hold">
+                                        <p:cTn id="142" dur="1" fill="hold">
                                           <p:stCondLst>
                                             <p:cond delay="0"/>
                                           </p:stCondLst>
